--- a/Instructions/PPT/Instructions for Assinging Papers to Session Chairs (Program Chair)[UV2026].pptx
+++ b/Instructions/PPT/Instructions for Assinging Papers to Session Chairs (Program Chair)[UV2026].pptx
@@ -270,14 +270,6 @@
     </p:ext>
   </p:extLst>
 </p:presentation>
-</file>
-
-<file path=ppt/revisionInfo.xml><?xml version="1.0" encoding="utf-8"?>
-<p1510:revInfo xmlns:a="http://schemas.openxmlformats.org/drawingml/2006/main" xmlns:r="http://schemas.openxmlformats.org/officeDocument/2006/relationships" xmlns:p1510="http://schemas.microsoft.com/office/powerpoint/2015/10/main">
-  <p1510:revLst>
-    <p1510:client id="{31F43EB1-0ED2-C449-A965-A61D9F5623EA}" v="3" dt="2026-05-31T03:27:09.853"/>
-  </p1510:revLst>
-</p1510:revInfo>
 </file>
 
 <file path=ppt/notesMasters/notesMaster1.xml><?xml version="1.0" encoding="utf-8"?>
@@ -2038,6 +2030,1008 @@
           </a:p>
         </p:txBody>
       </p:sp>
+      <p:sp>
+        <p:nvSpPr>
+          <p:cNvPr id="2" name="Google Shape;15;p3">
+            <a:extLst>
+              <a:ext uri="{FF2B5EF4-FFF2-40B4-BE49-F238E27FC236}">
+                <a16:creationId xmlns:a16="http://schemas.microsoft.com/office/drawing/2014/main" id="{419DE464-D727-57D1-5161-8B6A749F2E19}"/>
+              </a:ext>
+            </a:extLst>
+          </p:cNvPr>
+          <p:cNvSpPr txBox="1">
+            <a:spLocks/>
+          </p:cNvSpPr>
+          <p:nvPr userDrawn="1"/>
+        </p:nvSpPr>
+        <p:spPr>
+          <a:xfrm>
+            <a:off x="8472458" y="4663217"/>
+            <a:ext cx="548700" cy="393600"/>
+          </a:xfrm>
+          <a:prstGeom prst="rect">
+            <a:avLst/>
+          </a:prstGeom>
+          <a:noFill/>
+          <a:ln>
+            <a:noFill/>
+          </a:ln>
+        </p:spPr>
+        <p:txBody>
+          <a:bodyPr spcFirstLastPara="1" wrap="square" lIns="91425" tIns="91425" rIns="91425" bIns="91425" anchor="ctr" anchorCtr="0">
+            <a:normAutofit/>
+          </a:bodyPr>
+          <a:lstStyle>
+            <a:defPPr marR="0" lvl="0" algn="l" rtl="0">
+              <a:lnSpc>
+                <a:spcPct val="100000"/>
+              </a:lnSpc>
+              <a:spcBef>
+                <a:spcPts val="0"/>
+              </a:spcBef>
+              <a:spcAft>
+                <a:spcPts val="0"/>
+              </a:spcAft>
+            </a:defPPr>
+            <a:lvl1pPr marR="0" lvl="0" algn="r" rtl="0">
+              <a:lnSpc>
+                <a:spcPct val="100000"/>
+              </a:lnSpc>
+              <a:spcBef>
+                <a:spcPts val="0"/>
+              </a:spcBef>
+              <a:spcAft>
+                <a:spcPts val="0"/>
+              </a:spcAft>
+              <a:buClr>
+                <a:srgbClr val="000000"/>
+              </a:buClr>
+              <a:buFont typeface="Arial" panose="020B0604020202020204"/>
+              <a:buNone/>
+              <a:defRPr sz="1000" b="0" i="0" u="none" strike="noStrike" cap="none">
+                <a:solidFill>
+                  <a:schemeClr val="dk2"/>
+                </a:solidFill>
+                <a:latin typeface="Arial" panose="020B0604020202020204"/>
+                <a:ea typeface="Arial" panose="020B0604020202020204"/>
+                <a:cs typeface="Arial" panose="020B0604020202020204"/>
+                <a:sym typeface="Arial" panose="020B0604020202020204"/>
+              </a:defRPr>
+            </a:lvl1pPr>
+            <a:lvl2pPr marR="0" lvl="1" algn="r" rtl="0">
+              <a:lnSpc>
+                <a:spcPct val="100000"/>
+              </a:lnSpc>
+              <a:spcBef>
+                <a:spcPts val="0"/>
+              </a:spcBef>
+              <a:spcAft>
+                <a:spcPts val="0"/>
+              </a:spcAft>
+              <a:buClr>
+                <a:srgbClr val="000000"/>
+              </a:buClr>
+              <a:buFont typeface="Arial" panose="020B0604020202020204"/>
+              <a:buNone/>
+              <a:defRPr sz="1000" b="0" i="0" u="none" strike="noStrike" cap="none">
+                <a:solidFill>
+                  <a:schemeClr val="dk2"/>
+                </a:solidFill>
+                <a:latin typeface="Arial" panose="020B0604020202020204"/>
+                <a:ea typeface="Arial" panose="020B0604020202020204"/>
+                <a:cs typeface="Arial" panose="020B0604020202020204"/>
+                <a:sym typeface="Arial" panose="020B0604020202020204"/>
+              </a:defRPr>
+            </a:lvl2pPr>
+            <a:lvl3pPr marR="0" lvl="2" algn="r" rtl="0">
+              <a:lnSpc>
+                <a:spcPct val="100000"/>
+              </a:lnSpc>
+              <a:spcBef>
+                <a:spcPts val="0"/>
+              </a:spcBef>
+              <a:spcAft>
+                <a:spcPts val="0"/>
+              </a:spcAft>
+              <a:buClr>
+                <a:srgbClr val="000000"/>
+              </a:buClr>
+              <a:buFont typeface="Arial" panose="020B0604020202020204"/>
+              <a:buNone/>
+              <a:defRPr sz="1000" b="0" i="0" u="none" strike="noStrike" cap="none">
+                <a:solidFill>
+                  <a:schemeClr val="dk2"/>
+                </a:solidFill>
+                <a:latin typeface="Arial" panose="020B0604020202020204"/>
+                <a:ea typeface="Arial" panose="020B0604020202020204"/>
+                <a:cs typeface="Arial" panose="020B0604020202020204"/>
+                <a:sym typeface="Arial" panose="020B0604020202020204"/>
+              </a:defRPr>
+            </a:lvl3pPr>
+            <a:lvl4pPr marR="0" lvl="3" algn="r" rtl="0">
+              <a:lnSpc>
+                <a:spcPct val="100000"/>
+              </a:lnSpc>
+              <a:spcBef>
+                <a:spcPts val="0"/>
+              </a:spcBef>
+              <a:spcAft>
+                <a:spcPts val="0"/>
+              </a:spcAft>
+              <a:buClr>
+                <a:srgbClr val="000000"/>
+              </a:buClr>
+              <a:buFont typeface="Arial" panose="020B0604020202020204"/>
+              <a:buNone/>
+              <a:defRPr sz="1000" b="0" i="0" u="none" strike="noStrike" cap="none">
+                <a:solidFill>
+                  <a:schemeClr val="dk2"/>
+                </a:solidFill>
+                <a:latin typeface="Arial" panose="020B0604020202020204"/>
+                <a:ea typeface="Arial" panose="020B0604020202020204"/>
+                <a:cs typeface="Arial" panose="020B0604020202020204"/>
+                <a:sym typeface="Arial" panose="020B0604020202020204"/>
+              </a:defRPr>
+            </a:lvl4pPr>
+            <a:lvl5pPr marR="0" lvl="4" algn="r" rtl="0">
+              <a:lnSpc>
+                <a:spcPct val="100000"/>
+              </a:lnSpc>
+              <a:spcBef>
+                <a:spcPts val="0"/>
+              </a:spcBef>
+              <a:spcAft>
+                <a:spcPts val="0"/>
+              </a:spcAft>
+              <a:buClr>
+                <a:srgbClr val="000000"/>
+              </a:buClr>
+              <a:buFont typeface="Arial" panose="020B0604020202020204"/>
+              <a:buNone/>
+              <a:defRPr sz="1000" b="0" i="0" u="none" strike="noStrike" cap="none">
+                <a:solidFill>
+                  <a:schemeClr val="dk2"/>
+                </a:solidFill>
+                <a:latin typeface="Arial" panose="020B0604020202020204"/>
+                <a:ea typeface="Arial" panose="020B0604020202020204"/>
+                <a:cs typeface="Arial" panose="020B0604020202020204"/>
+                <a:sym typeface="Arial" panose="020B0604020202020204"/>
+              </a:defRPr>
+            </a:lvl5pPr>
+            <a:lvl6pPr marR="0" lvl="5" algn="r" rtl="0">
+              <a:lnSpc>
+                <a:spcPct val="100000"/>
+              </a:lnSpc>
+              <a:spcBef>
+                <a:spcPts val="0"/>
+              </a:spcBef>
+              <a:spcAft>
+                <a:spcPts val="0"/>
+              </a:spcAft>
+              <a:buClr>
+                <a:srgbClr val="000000"/>
+              </a:buClr>
+              <a:buFont typeface="Arial" panose="020B0604020202020204"/>
+              <a:buNone/>
+              <a:defRPr sz="1000" b="0" i="0" u="none" strike="noStrike" cap="none">
+                <a:solidFill>
+                  <a:schemeClr val="dk2"/>
+                </a:solidFill>
+                <a:latin typeface="Arial" panose="020B0604020202020204"/>
+                <a:ea typeface="Arial" panose="020B0604020202020204"/>
+                <a:cs typeface="Arial" panose="020B0604020202020204"/>
+                <a:sym typeface="Arial" panose="020B0604020202020204"/>
+              </a:defRPr>
+            </a:lvl6pPr>
+            <a:lvl7pPr marR="0" lvl="6" algn="r" rtl="0">
+              <a:lnSpc>
+                <a:spcPct val="100000"/>
+              </a:lnSpc>
+              <a:spcBef>
+                <a:spcPts val="0"/>
+              </a:spcBef>
+              <a:spcAft>
+                <a:spcPts val="0"/>
+              </a:spcAft>
+              <a:buClr>
+                <a:srgbClr val="000000"/>
+              </a:buClr>
+              <a:buFont typeface="Arial" panose="020B0604020202020204"/>
+              <a:buNone/>
+              <a:defRPr sz="1000" b="0" i="0" u="none" strike="noStrike" cap="none">
+                <a:solidFill>
+                  <a:schemeClr val="dk2"/>
+                </a:solidFill>
+                <a:latin typeface="Arial" panose="020B0604020202020204"/>
+                <a:ea typeface="Arial" panose="020B0604020202020204"/>
+                <a:cs typeface="Arial" panose="020B0604020202020204"/>
+                <a:sym typeface="Arial" panose="020B0604020202020204"/>
+              </a:defRPr>
+            </a:lvl7pPr>
+            <a:lvl8pPr marR="0" lvl="7" algn="r" rtl="0">
+              <a:lnSpc>
+                <a:spcPct val="100000"/>
+              </a:lnSpc>
+              <a:spcBef>
+                <a:spcPts val="0"/>
+              </a:spcBef>
+              <a:spcAft>
+                <a:spcPts val="0"/>
+              </a:spcAft>
+              <a:buClr>
+                <a:srgbClr val="000000"/>
+              </a:buClr>
+              <a:buFont typeface="Arial" panose="020B0604020202020204"/>
+              <a:buNone/>
+              <a:defRPr sz="1000" b="0" i="0" u="none" strike="noStrike" cap="none">
+                <a:solidFill>
+                  <a:schemeClr val="dk2"/>
+                </a:solidFill>
+                <a:latin typeface="Arial" panose="020B0604020202020204"/>
+                <a:ea typeface="Arial" panose="020B0604020202020204"/>
+                <a:cs typeface="Arial" panose="020B0604020202020204"/>
+                <a:sym typeface="Arial" panose="020B0604020202020204"/>
+              </a:defRPr>
+            </a:lvl8pPr>
+            <a:lvl9pPr marR="0" lvl="8" algn="r" rtl="0">
+              <a:lnSpc>
+                <a:spcPct val="100000"/>
+              </a:lnSpc>
+              <a:spcBef>
+                <a:spcPts val="0"/>
+              </a:spcBef>
+              <a:spcAft>
+                <a:spcPts val="0"/>
+              </a:spcAft>
+              <a:buClr>
+                <a:srgbClr val="000000"/>
+              </a:buClr>
+              <a:buFont typeface="Arial" panose="020B0604020202020204"/>
+              <a:buNone/>
+              <a:defRPr sz="1000" b="0" i="0" u="none" strike="noStrike" cap="none">
+                <a:solidFill>
+                  <a:schemeClr val="dk2"/>
+                </a:solidFill>
+                <a:latin typeface="Arial" panose="020B0604020202020204"/>
+                <a:ea typeface="Arial" panose="020B0604020202020204"/>
+                <a:cs typeface="Arial" panose="020B0604020202020204"/>
+                <a:sym typeface="Arial" panose="020B0604020202020204"/>
+              </a:defRPr>
+            </a:lvl9pPr>
+          </a:lstStyle>
+          <a:p>
+            <a:fld id="{00000000-1234-1234-1234-123412341234}" type="slidenum">
+              <a:rPr lang="en-GB" smtClean="0"/>
+              <a:pPr/>
+              <a:t>‹#›</a:t>
+            </a:fld>
+            <a:endParaRPr lang="en-GB"/>
+          </a:p>
+        </p:txBody>
+      </p:sp>
+      <p:sp>
+        <p:nvSpPr>
+          <p:cNvPr id="3" name="矩形 7">
+            <a:extLst>
+              <a:ext uri="{FF2B5EF4-FFF2-40B4-BE49-F238E27FC236}">
+                <a16:creationId xmlns:a16="http://schemas.microsoft.com/office/drawing/2014/main" id="{C4DB9E90-C8BE-429D-7B75-05A6BD47EB1B}"/>
+              </a:ext>
+            </a:extLst>
+          </p:cNvPr>
+          <p:cNvSpPr/>
+          <p:nvPr userDrawn="1"/>
+        </p:nvSpPr>
+        <p:spPr>
+          <a:xfrm flipH="1">
+            <a:off x="0" y="4778374"/>
+            <a:ext cx="9144000" cy="388032"/>
+          </a:xfrm>
+          <a:custGeom>
+            <a:avLst/>
+            <a:gdLst>
+              <a:gd name="connsiteX0" fmla="*/ 0 w 12192000"/>
+              <a:gd name="connsiteY0" fmla="*/ 0 h 609599"/>
+              <a:gd name="connsiteX1" fmla="*/ 12192000 w 12192000"/>
+              <a:gd name="connsiteY1" fmla="*/ 0 h 609599"/>
+              <a:gd name="connsiteX2" fmla="*/ 12192000 w 12192000"/>
+              <a:gd name="connsiteY2" fmla="*/ 609599 h 609599"/>
+              <a:gd name="connsiteX3" fmla="*/ 0 w 12192000"/>
+              <a:gd name="connsiteY3" fmla="*/ 609599 h 609599"/>
+              <a:gd name="connsiteX4" fmla="*/ 0 w 12192000"/>
+              <a:gd name="connsiteY4" fmla="*/ 0 h 609599"/>
+              <a:gd name="connsiteX0" fmla="*/ 0 w 12192000"/>
+              <a:gd name="connsiteY0" fmla="*/ 548640 h 1158239"/>
+              <a:gd name="connsiteX1" fmla="*/ 12192000 w 12192000"/>
+              <a:gd name="connsiteY1" fmla="*/ 548640 h 1158239"/>
+              <a:gd name="connsiteX2" fmla="*/ 12192000 w 12192000"/>
+              <a:gd name="connsiteY2" fmla="*/ 1158239 h 1158239"/>
+              <a:gd name="connsiteX3" fmla="*/ 0 w 12192000"/>
+              <a:gd name="connsiteY3" fmla="*/ 1158239 h 1158239"/>
+              <a:gd name="connsiteX4" fmla="*/ 0 w 12192000"/>
+              <a:gd name="connsiteY4" fmla="*/ 548640 h 1158239"/>
+              <a:gd name="connsiteX0" fmla="*/ 0 w 12192000"/>
+              <a:gd name="connsiteY0" fmla="*/ 376700 h 986299"/>
+              <a:gd name="connsiteX1" fmla="*/ 12192000 w 12192000"/>
+              <a:gd name="connsiteY1" fmla="*/ 376700 h 986299"/>
+              <a:gd name="connsiteX2" fmla="*/ 12192000 w 12192000"/>
+              <a:gd name="connsiteY2" fmla="*/ 986299 h 986299"/>
+              <a:gd name="connsiteX3" fmla="*/ 0 w 12192000"/>
+              <a:gd name="connsiteY3" fmla="*/ 986299 h 986299"/>
+              <a:gd name="connsiteX4" fmla="*/ 0 w 12192000"/>
+              <a:gd name="connsiteY4" fmla="*/ 376700 h 986299"/>
+              <a:gd name="connsiteX0" fmla="*/ 0 w 12192000"/>
+              <a:gd name="connsiteY0" fmla="*/ 438928 h 1048527"/>
+              <a:gd name="connsiteX1" fmla="*/ 12192000 w 12192000"/>
+              <a:gd name="connsiteY1" fmla="*/ 438928 h 1048527"/>
+              <a:gd name="connsiteX2" fmla="*/ 12192000 w 12192000"/>
+              <a:gd name="connsiteY2" fmla="*/ 1048527 h 1048527"/>
+              <a:gd name="connsiteX3" fmla="*/ 0 w 12192000"/>
+              <a:gd name="connsiteY3" fmla="*/ 1048527 h 1048527"/>
+              <a:gd name="connsiteX4" fmla="*/ 0 w 12192000"/>
+              <a:gd name="connsiteY4" fmla="*/ 438928 h 1048527"/>
+              <a:gd name="connsiteX0" fmla="*/ 0 w 12192000"/>
+              <a:gd name="connsiteY0" fmla="*/ 181799 h 791398"/>
+              <a:gd name="connsiteX1" fmla="*/ 12192000 w 12192000"/>
+              <a:gd name="connsiteY1" fmla="*/ 181799 h 791398"/>
+              <a:gd name="connsiteX2" fmla="*/ 12192000 w 12192000"/>
+              <a:gd name="connsiteY2" fmla="*/ 791398 h 791398"/>
+              <a:gd name="connsiteX3" fmla="*/ 0 w 12192000"/>
+              <a:gd name="connsiteY3" fmla="*/ 791398 h 791398"/>
+              <a:gd name="connsiteX4" fmla="*/ 0 w 12192000"/>
+              <a:gd name="connsiteY4" fmla="*/ 181799 h 791398"/>
+              <a:gd name="connsiteX0" fmla="*/ 0 w 12192000"/>
+              <a:gd name="connsiteY0" fmla="*/ 187345 h 796944"/>
+              <a:gd name="connsiteX1" fmla="*/ 12192000 w 12192000"/>
+              <a:gd name="connsiteY1" fmla="*/ 187345 h 796944"/>
+              <a:gd name="connsiteX2" fmla="*/ 12192000 w 12192000"/>
+              <a:gd name="connsiteY2" fmla="*/ 796944 h 796944"/>
+              <a:gd name="connsiteX3" fmla="*/ 0 w 12192000"/>
+              <a:gd name="connsiteY3" fmla="*/ 796944 h 796944"/>
+              <a:gd name="connsiteX4" fmla="*/ 0 w 12192000"/>
+              <a:gd name="connsiteY4" fmla="*/ 187345 h 796944"/>
+              <a:gd name="connsiteX0" fmla="*/ 0 w 12192000"/>
+              <a:gd name="connsiteY0" fmla="*/ 154569 h 764168"/>
+              <a:gd name="connsiteX1" fmla="*/ 12192000 w 12192000"/>
+              <a:gd name="connsiteY1" fmla="*/ 154569 h 764168"/>
+              <a:gd name="connsiteX2" fmla="*/ 12192000 w 12192000"/>
+              <a:gd name="connsiteY2" fmla="*/ 764168 h 764168"/>
+              <a:gd name="connsiteX3" fmla="*/ 0 w 12192000"/>
+              <a:gd name="connsiteY3" fmla="*/ 764168 h 764168"/>
+              <a:gd name="connsiteX4" fmla="*/ 0 w 12192000"/>
+              <a:gd name="connsiteY4" fmla="*/ 154569 h 764168"/>
+              <a:gd name="connsiteX0" fmla="*/ 0 w 12192000"/>
+              <a:gd name="connsiteY0" fmla="*/ 165354 h 774953"/>
+              <a:gd name="connsiteX1" fmla="*/ 12192000 w 12192000"/>
+              <a:gd name="connsiteY1" fmla="*/ 165354 h 774953"/>
+              <a:gd name="connsiteX2" fmla="*/ 12192000 w 12192000"/>
+              <a:gd name="connsiteY2" fmla="*/ 774953 h 774953"/>
+              <a:gd name="connsiteX3" fmla="*/ 0 w 12192000"/>
+              <a:gd name="connsiteY3" fmla="*/ 774953 h 774953"/>
+              <a:gd name="connsiteX4" fmla="*/ 0 w 12192000"/>
+              <a:gd name="connsiteY4" fmla="*/ 165354 h 774953"/>
+              <a:gd name="connsiteX0" fmla="*/ 0 w 12192000"/>
+              <a:gd name="connsiteY0" fmla="*/ 181798 h 791397"/>
+              <a:gd name="connsiteX1" fmla="*/ 12192000 w 12192000"/>
+              <a:gd name="connsiteY1" fmla="*/ 181798 h 791397"/>
+              <a:gd name="connsiteX2" fmla="*/ 12192000 w 12192000"/>
+              <a:gd name="connsiteY2" fmla="*/ 791397 h 791397"/>
+              <a:gd name="connsiteX3" fmla="*/ 0 w 12192000"/>
+              <a:gd name="connsiteY3" fmla="*/ 791397 h 791397"/>
+              <a:gd name="connsiteX4" fmla="*/ 0 w 12192000"/>
+              <a:gd name="connsiteY4" fmla="*/ 181798 h 791397"/>
+              <a:gd name="connsiteX0" fmla="*/ 0 w 12192000"/>
+              <a:gd name="connsiteY0" fmla="*/ 88858 h 698457"/>
+              <a:gd name="connsiteX1" fmla="*/ 12192000 w 12192000"/>
+              <a:gd name="connsiteY1" fmla="*/ 88858 h 698457"/>
+              <a:gd name="connsiteX2" fmla="*/ 12192000 w 12192000"/>
+              <a:gd name="connsiteY2" fmla="*/ 698457 h 698457"/>
+              <a:gd name="connsiteX3" fmla="*/ 0 w 12192000"/>
+              <a:gd name="connsiteY3" fmla="*/ 698457 h 698457"/>
+              <a:gd name="connsiteX4" fmla="*/ 0 w 12192000"/>
+              <a:gd name="connsiteY4" fmla="*/ 88858 h 698457"/>
+              <a:gd name="connsiteX0" fmla="*/ 10160 w 12192000"/>
+              <a:gd name="connsiteY0" fmla="*/ 93903 h 612062"/>
+              <a:gd name="connsiteX1" fmla="*/ 12192000 w 12192000"/>
+              <a:gd name="connsiteY1" fmla="*/ 2463 h 612062"/>
+              <a:gd name="connsiteX2" fmla="*/ 12192000 w 12192000"/>
+              <a:gd name="connsiteY2" fmla="*/ 612062 h 612062"/>
+              <a:gd name="connsiteX3" fmla="*/ 0 w 12192000"/>
+              <a:gd name="connsiteY3" fmla="*/ 612062 h 612062"/>
+              <a:gd name="connsiteX4" fmla="*/ 10160 w 12192000"/>
+              <a:gd name="connsiteY4" fmla="*/ 93903 h 612062"/>
+              <a:gd name="connsiteX0" fmla="*/ 0 w 12181840"/>
+              <a:gd name="connsiteY0" fmla="*/ 93903 h 612062"/>
+              <a:gd name="connsiteX1" fmla="*/ 12181840 w 12181840"/>
+              <a:gd name="connsiteY1" fmla="*/ 2463 h 612062"/>
+              <a:gd name="connsiteX2" fmla="*/ 12181840 w 12181840"/>
+              <a:gd name="connsiteY2" fmla="*/ 612062 h 612062"/>
+              <a:gd name="connsiteX3" fmla="*/ 12700 w 12181840"/>
+              <a:gd name="connsiteY3" fmla="*/ 612062 h 612062"/>
+              <a:gd name="connsiteX4" fmla="*/ 0 w 12181840"/>
+              <a:gd name="connsiteY4" fmla="*/ 93903 h 612062"/>
+              <a:gd name="connsiteX0" fmla="*/ 0 w 12181840"/>
+              <a:gd name="connsiteY0" fmla="*/ 93459 h 619238"/>
+              <a:gd name="connsiteX1" fmla="*/ 12181840 w 12181840"/>
+              <a:gd name="connsiteY1" fmla="*/ 9639 h 619238"/>
+              <a:gd name="connsiteX2" fmla="*/ 12181840 w 12181840"/>
+              <a:gd name="connsiteY2" fmla="*/ 619238 h 619238"/>
+              <a:gd name="connsiteX3" fmla="*/ 12700 w 12181840"/>
+              <a:gd name="connsiteY3" fmla="*/ 619238 h 619238"/>
+              <a:gd name="connsiteX4" fmla="*/ 0 w 12181840"/>
+              <a:gd name="connsiteY4" fmla="*/ 93459 h 619238"/>
+              <a:gd name="connsiteX0" fmla="*/ 0 w 12181840"/>
+              <a:gd name="connsiteY0" fmla="*/ 93459 h 619238"/>
+              <a:gd name="connsiteX1" fmla="*/ 12181840 w 12181840"/>
+              <a:gd name="connsiteY1" fmla="*/ 9639 h 619238"/>
+              <a:gd name="connsiteX2" fmla="*/ 12181840 w 12181840"/>
+              <a:gd name="connsiteY2" fmla="*/ 619238 h 619238"/>
+              <a:gd name="connsiteX3" fmla="*/ 12700 w 12181840"/>
+              <a:gd name="connsiteY3" fmla="*/ 619238 h 619238"/>
+              <a:gd name="connsiteX4" fmla="*/ 0 w 12181840"/>
+              <a:gd name="connsiteY4" fmla="*/ 93459 h 619238"/>
+              <a:gd name="connsiteX0" fmla="*/ 0 w 12197080"/>
+              <a:gd name="connsiteY0" fmla="*/ 93459 h 619238"/>
+              <a:gd name="connsiteX1" fmla="*/ 12197080 w 12197080"/>
+              <a:gd name="connsiteY1" fmla="*/ 9639 h 619238"/>
+              <a:gd name="connsiteX2" fmla="*/ 12197080 w 12197080"/>
+              <a:gd name="connsiteY2" fmla="*/ 619238 h 619238"/>
+              <a:gd name="connsiteX3" fmla="*/ 27940 w 12197080"/>
+              <a:gd name="connsiteY3" fmla="*/ 619238 h 619238"/>
+              <a:gd name="connsiteX4" fmla="*/ 0 w 12197080"/>
+              <a:gd name="connsiteY4" fmla="*/ 93459 h 619238"/>
+              <a:gd name="connsiteX0" fmla="*/ 2540 w 12199620"/>
+              <a:gd name="connsiteY0" fmla="*/ 93459 h 619238"/>
+              <a:gd name="connsiteX1" fmla="*/ 12199620 w 12199620"/>
+              <a:gd name="connsiteY1" fmla="*/ 9639 h 619238"/>
+              <a:gd name="connsiteX2" fmla="*/ 12199620 w 12199620"/>
+              <a:gd name="connsiteY2" fmla="*/ 619238 h 619238"/>
+              <a:gd name="connsiteX3" fmla="*/ 0 w 12199620"/>
+              <a:gd name="connsiteY3" fmla="*/ 611618 h 619238"/>
+              <a:gd name="connsiteX4" fmla="*/ 2540 w 12199620"/>
+              <a:gd name="connsiteY4" fmla="*/ 93459 h 619238"/>
+              <a:gd name="connsiteX0" fmla="*/ 153 w 12201043"/>
+              <a:gd name="connsiteY0" fmla="*/ 152400 h 609599"/>
+              <a:gd name="connsiteX1" fmla="*/ 12201043 w 12201043"/>
+              <a:gd name="connsiteY1" fmla="*/ 0 h 609599"/>
+              <a:gd name="connsiteX2" fmla="*/ 12201043 w 12201043"/>
+              <a:gd name="connsiteY2" fmla="*/ 609599 h 609599"/>
+              <a:gd name="connsiteX3" fmla="*/ 1423 w 12201043"/>
+              <a:gd name="connsiteY3" fmla="*/ 601979 h 609599"/>
+              <a:gd name="connsiteX4" fmla="*/ 153 w 12201043"/>
+              <a:gd name="connsiteY4" fmla="*/ 152400 h 609599"/>
+              <a:gd name="connsiteX0" fmla="*/ 153 w 12201043"/>
+              <a:gd name="connsiteY0" fmla="*/ 184785 h 609599"/>
+              <a:gd name="connsiteX1" fmla="*/ 12201043 w 12201043"/>
+              <a:gd name="connsiteY1" fmla="*/ 0 h 609599"/>
+              <a:gd name="connsiteX2" fmla="*/ 12201043 w 12201043"/>
+              <a:gd name="connsiteY2" fmla="*/ 609599 h 609599"/>
+              <a:gd name="connsiteX3" fmla="*/ 1423 w 12201043"/>
+              <a:gd name="connsiteY3" fmla="*/ 601979 h 609599"/>
+              <a:gd name="connsiteX4" fmla="*/ 153 w 12201043"/>
+              <a:gd name="connsiteY4" fmla="*/ 184785 h 609599"/>
+            </a:gdLst>
+            <a:ahLst/>
+            <a:cxnLst>
+              <a:cxn ang="0">
+                <a:pos x="connsiteX0" y="connsiteY0"/>
+              </a:cxn>
+              <a:cxn ang="0">
+                <a:pos x="connsiteX1" y="connsiteY1"/>
+              </a:cxn>
+              <a:cxn ang="0">
+                <a:pos x="connsiteX2" y="connsiteY2"/>
+              </a:cxn>
+              <a:cxn ang="0">
+                <a:pos x="connsiteX3" y="connsiteY3"/>
+              </a:cxn>
+              <a:cxn ang="0">
+                <a:pos x="connsiteX4" y="connsiteY4"/>
+              </a:cxn>
+            </a:cxnLst>
+            <a:rect l="l" t="t" r="r" b="b"/>
+            <a:pathLst>
+              <a:path w="12201043" h="609599">
+                <a:moveTo>
+                  <a:pt x="153" y="184785"/>
+                </a:moveTo>
+                <a:cubicBezTo>
+                  <a:pt x="6075833" y="-272415"/>
+                  <a:pt x="8457083" y="1051560"/>
+                  <a:pt x="12201043" y="0"/>
+                </a:cubicBezTo>
+                <a:lnTo>
+                  <a:pt x="12201043" y="609599"/>
+                </a:lnTo>
+                <a:lnTo>
+                  <a:pt x="1423" y="601979"/>
+                </a:lnTo>
+                <a:cubicBezTo>
+                  <a:pt x="2270" y="429259"/>
+                  <a:pt x="-694" y="357505"/>
+                  <a:pt x="153" y="184785"/>
+                </a:cubicBezTo>
+                <a:close/>
+              </a:path>
+            </a:pathLst>
+          </a:custGeom>
+          <a:gradFill flip="none" rotWithShape="1">
+            <a:gsLst>
+              <a:gs pos="60000">
+                <a:srgbClr val="008A41">
+                  <a:alpha val="49804"/>
+                </a:srgbClr>
+              </a:gs>
+              <a:gs pos="0">
+                <a:srgbClr val="008A41">
+                  <a:alpha val="70000"/>
+                </a:srgbClr>
+              </a:gs>
+              <a:gs pos="100000">
+                <a:srgbClr val="A0D2B4"/>
+              </a:gs>
+            </a:gsLst>
+            <a:lin ang="0" scaled="1"/>
+            <a:tileRect/>
+          </a:gradFill>
+          <a:ln>
+            <a:noFill/>
+          </a:ln>
+        </p:spPr>
+        <p:style>
+          <a:lnRef idx="2">
+            <a:schemeClr val="accent1">
+              <a:shade val="50000"/>
+            </a:schemeClr>
+          </a:lnRef>
+          <a:fillRef idx="1">
+            <a:schemeClr val="accent1"/>
+          </a:fillRef>
+          <a:effectRef idx="0">
+            <a:schemeClr val="accent1"/>
+          </a:effectRef>
+          <a:fontRef idx="minor">
+            <a:schemeClr val="lt1"/>
+          </a:fontRef>
+        </p:style>
+        <p:txBody>
+          <a:bodyPr rtlCol="0" anchor="ctr"/>
+          <a:lstStyle/>
+          <a:p>
+            <a:pPr algn="ctr"/>
+            <a:endParaRPr lang="zh-CN" altLang="en-US"/>
+          </a:p>
+        </p:txBody>
+      </p:sp>
+      <p:sp>
+        <p:nvSpPr>
+          <p:cNvPr id="4" name="任意多边形: 形状 3">
+            <a:extLst>
+              <a:ext uri="{FF2B5EF4-FFF2-40B4-BE49-F238E27FC236}">
+                <a16:creationId xmlns:a16="http://schemas.microsoft.com/office/drawing/2014/main" id="{B4A1A480-0651-3DF0-3BCD-719CD6FD113B}"/>
+              </a:ext>
+            </a:extLst>
+          </p:cNvPr>
+          <p:cNvSpPr/>
+          <p:nvPr userDrawn="1"/>
+        </p:nvSpPr>
+        <p:spPr>
+          <a:xfrm flipH="1" flipV="1">
+            <a:off x="-6103" y="-10167"/>
+            <a:ext cx="9143999" cy="388031"/>
+          </a:xfrm>
+          <a:custGeom>
+            <a:avLst/>
+            <a:gdLst>
+              <a:gd name="connsiteX0" fmla="*/ 12192000 w 12192000"/>
+              <a:gd name="connsiteY0" fmla="*/ 0 h 2039768"/>
+              <a:gd name="connsiteX1" fmla="*/ 12192000 w 12192000"/>
+              <a:gd name="connsiteY1" fmla="*/ 2039768 h 2039768"/>
+              <a:gd name="connsiteX2" fmla="*/ 0 w 12192000"/>
+              <a:gd name="connsiteY2" fmla="*/ 2039768 h 2039768"/>
+              <a:gd name="connsiteX3" fmla="*/ 0 w 12192000"/>
+              <a:gd name="connsiteY3" fmla="*/ 819391 h 2039768"/>
+              <a:gd name="connsiteX4" fmla="*/ 37309 w 12192000"/>
+              <a:gd name="connsiteY4" fmla="*/ 834936 h 2039768"/>
+              <a:gd name="connsiteX5" fmla="*/ 5319640 w 12192000"/>
+              <a:gd name="connsiteY5" fmla="*/ 1747868 h 2039768"/>
+              <a:gd name="connsiteX6" fmla="*/ 11971651 w 12192000"/>
+              <a:gd name="connsiteY6" fmla="*/ 149892 h 2039768"/>
+              <a:gd name="connsiteX0" fmla="*/ 12192000 w 12192000"/>
+              <a:gd name="connsiteY0" fmla="*/ 373966 h 1893600"/>
+              <a:gd name="connsiteX1" fmla="*/ 12192000 w 12192000"/>
+              <a:gd name="connsiteY1" fmla="*/ 1893600 h 1893600"/>
+              <a:gd name="connsiteX2" fmla="*/ 0 w 12192000"/>
+              <a:gd name="connsiteY2" fmla="*/ 1893600 h 1893600"/>
+              <a:gd name="connsiteX3" fmla="*/ 0 w 12192000"/>
+              <a:gd name="connsiteY3" fmla="*/ 673223 h 1893600"/>
+              <a:gd name="connsiteX4" fmla="*/ 37309 w 12192000"/>
+              <a:gd name="connsiteY4" fmla="*/ 688768 h 1893600"/>
+              <a:gd name="connsiteX5" fmla="*/ 5319640 w 12192000"/>
+              <a:gd name="connsiteY5" fmla="*/ 1601700 h 1893600"/>
+              <a:gd name="connsiteX6" fmla="*/ 11971651 w 12192000"/>
+              <a:gd name="connsiteY6" fmla="*/ 3724 h 1893600"/>
+              <a:gd name="connsiteX7" fmla="*/ 12192000 w 12192000"/>
+              <a:gd name="connsiteY7" fmla="*/ 373966 h 1893600"/>
+              <a:gd name="connsiteX0" fmla="*/ 12192000 w 12192000"/>
+              <a:gd name="connsiteY0" fmla="*/ 1413 h 1521047"/>
+              <a:gd name="connsiteX1" fmla="*/ 12192000 w 12192000"/>
+              <a:gd name="connsiteY1" fmla="*/ 1521047 h 1521047"/>
+              <a:gd name="connsiteX2" fmla="*/ 0 w 12192000"/>
+              <a:gd name="connsiteY2" fmla="*/ 1521047 h 1521047"/>
+              <a:gd name="connsiteX3" fmla="*/ 0 w 12192000"/>
+              <a:gd name="connsiteY3" fmla="*/ 300670 h 1521047"/>
+              <a:gd name="connsiteX4" fmla="*/ 37309 w 12192000"/>
+              <a:gd name="connsiteY4" fmla="*/ 316215 h 1521047"/>
+              <a:gd name="connsiteX5" fmla="*/ 5319640 w 12192000"/>
+              <a:gd name="connsiteY5" fmla="*/ 1229147 h 1521047"/>
+              <a:gd name="connsiteX6" fmla="*/ 12192000 w 12192000"/>
+              <a:gd name="connsiteY6" fmla="*/ 1413 h 1521047"/>
+              <a:gd name="connsiteX0" fmla="*/ 12192000 w 12192000"/>
+              <a:gd name="connsiteY0" fmla="*/ 0 h 1519634"/>
+              <a:gd name="connsiteX1" fmla="*/ 12192000 w 12192000"/>
+              <a:gd name="connsiteY1" fmla="*/ 1519634 h 1519634"/>
+              <a:gd name="connsiteX2" fmla="*/ 0 w 12192000"/>
+              <a:gd name="connsiteY2" fmla="*/ 1519634 h 1519634"/>
+              <a:gd name="connsiteX3" fmla="*/ 0 w 12192000"/>
+              <a:gd name="connsiteY3" fmla="*/ 299257 h 1519634"/>
+              <a:gd name="connsiteX4" fmla="*/ 37309 w 12192000"/>
+              <a:gd name="connsiteY4" fmla="*/ 314802 h 1519634"/>
+              <a:gd name="connsiteX5" fmla="*/ 5319640 w 12192000"/>
+              <a:gd name="connsiteY5" fmla="*/ 1227734 h 1519634"/>
+              <a:gd name="connsiteX6" fmla="*/ 12192000 w 12192000"/>
+              <a:gd name="connsiteY6" fmla="*/ 0 h 1519634"/>
+              <a:gd name="connsiteX0" fmla="*/ 12192000 w 12192000"/>
+              <a:gd name="connsiteY0" fmla="*/ 0 h 1519634"/>
+              <a:gd name="connsiteX1" fmla="*/ 12192000 w 12192000"/>
+              <a:gd name="connsiteY1" fmla="*/ 1519634 h 1519634"/>
+              <a:gd name="connsiteX2" fmla="*/ 0 w 12192000"/>
+              <a:gd name="connsiteY2" fmla="*/ 1519634 h 1519634"/>
+              <a:gd name="connsiteX3" fmla="*/ 0 w 12192000"/>
+              <a:gd name="connsiteY3" fmla="*/ 299257 h 1519634"/>
+              <a:gd name="connsiteX4" fmla="*/ 140179 w 12192000"/>
+              <a:gd name="connsiteY4" fmla="*/ 401490 h 1519634"/>
+              <a:gd name="connsiteX5" fmla="*/ 5319640 w 12192000"/>
+              <a:gd name="connsiteY5" fmla="*/ 1227734 h 1519634"/>
+              <a:gd name="connsiteX6" fmla="*/ 12192000 w 12192000"/>
+              <a:gd name="connsiteY6" fmla="*/ 0 h 1519634"/>
+              <a:gd name="connsiteX0" fmla="*/ 12192000 w 12192000"/>
+              <a:gd name="connsiteY0" fmla="*/ 0 h 1519634"/>
+              <a:gd name="connsiteX1" fmla="*/ 12192000 w 12192000"/>
+              <a:gd name="connsiteY1" fmla="*/ 1519634 h 1519634"/>
+              <a:gd name="connsiteX2" fmla="*/ 0 w 12192000"/>
+              <a:gd name="connsiteY2" fmla="*/ 1519634 h 1519634"/>
+              <a:gd name="connsiteX3" fmla="*/ 0 w 12192000"/>
+              <a:gd name="connsiteY3" fmla="*/ 299257 h 1519634"/>
+              <a:gd name="connsiteX4" fmla="*/ 5319640 w 12192000"/>
+              <a:gd name="connsiteY4" fmla="*/ 1227734 h 1519634"/>
+              <a:gd name="connsiteX5" fmla="*/ 12192000 w 12192000"/>
+              <a:gd name="connsiteY5" fmla="*/ 0 h 1519634"/>
+              <a:gd name="connsiteX0" fmla="*/ 12192000 w 12192000"/>
+              <a:gd name="connsiteY0" fmla="*/ 0 h 1519634"/>
+              <a:gd name="connsiteX1" fmla="*/ 12192000 w 12192000"/>
+              <a:gd name="connsiteY1" fmla="*/ 1519634 h 1519634"/>
+              <a:gd name="connsiteX2" fmla="*/ 0 w 12192000"/>
+              <a:gd name="connsiteY2" fmla="*/ 1519634 h 1519634"/>
+              <a:gd name="connsiteX3" fmla="*/ 3810 w 12192000"/>
+              <a:gd name="connsiteY3" fmla="*/ 628674 h 1519634"/>
+              <a:gd name="connsiteX4" fmla="*/ 5319640 w 12192000"/>
+              <a:gd name="connsiteY4" fmla="*/ 1227734 h 1519634"/>
+              <a:gd name="connsiteX5" fmla="*/ 12192000 w 12192000"/>
+              <a:gd name="connsiteY5" fmla="*/ 0 h 1519634"/>
+              <a:gd name="connsiteX0" fmla="*/ 12192000 w 12192000"/>
+              <a:gd name="connsiteY0" fmla="*/ 0 h 1519634"/>
+              <a:gd name="connsiteX1" fmla="*/ 12192000 w 12192000"/>
+              <a:gd name="connsiteY1" fmla="*/ 1519634 h 1519634"/>
+              <a:gd name="connsiteX2" fmla="*/ 0 w 12192000"/>
+              <a:gd name="connsiteY2" fmla="*/ 1519634 h 1519634"/>
+              <a:gd name="connsiteX3" fmla="*/ 3810 w 12192000"/>
+              <a:gd name="connsiteY3" fmla="*/ 628674 h 1519634"/>
+              <a:gd name="connsiteX4" fmla="*/ 5319640 w 12192000"/>
+              <a:gd name="connsiteY4" fmla="*/ 1227734 h 1519634"/>
+              <a:gd name="connsiteX5" fmla="*/ 12192000 w 12192000"/>
+              <a:gd name="connsiteY5" fmla="*/ 0 h 1519634"/>
+              <a:gd name="connsiteX0" fmla="*/ 12192000 w 12192000"/>
+              <a:gd name="connsiteY0" fmla="*/ 0 h 1519634"/>
+              <a:gd name="connsiteX1" fmla="*/ 12192000 w 12192000"/>
+              <a:gd name="connsiteY1" fmla="*/ 1519634 h 1519634"/>
+              <a:gd name="connsiteX2" fmla="*/ 0 w 12192000"/>
+              <a:gd name="connsiteY2" fmla="*/ 1519634 h 1519634"/>
+              <a:gd name="connsiteX3" fmla="*/ 3810 w 12192000"/>
+              <a:gd name="connsiteY3" fmla="*/ 628674 h 1519634"/>
+              <a:gd name="connsiteX4" fmla="*/ 5319640 w 12192000"/>
+              <a:gd name="connsiteY4" fmla="*/ 1227734 h 1519634"/>
+              <a:gd name="connsiteX5" fmla="*/ 12192000 w 12192000"/>
+              <a:gd name="connsiteY5" fmla="*/ 0 h 1519634"/>
+              <a:gd name="connsiteX0" fmla="*/ 12192000 w 12192000"/>
+              <a:gd name="connsiteY0" fmla="*/ 0 h 1519634"/>
+              <a:gd name="connsiteX1" fmla="*/ 12192000 w 12192000"/>
+              <a:gd name="connsiteY1" fmla="*/ 1519634 h 1519634"/>
+              <a:gd name="connsiteX2" fmla="*/ 0 w 12192000"/>
+              <a:gd name="connsiteY2" fmla="*/ 1519634 h 1519634"/>
+              <a:gd name="connsiteX3" fmla="*/ 3810 w 12192000"/>
+              <a:gd name="connsiteY3" fmla="*/ 628674 h 1519634"/>
+              <a:gd name="connsiteX4" fmla="*/ 5319640 w 12192000"/>
+              <a:gd name="connsiteY4" fmla="*/ 1227734 h 1519634"/>
+              <a:gd name="connsiteX5" fmla="*/ 12192000 w 12192000"/>
+              <a:gd name="connsiteY5" fmla="*/ 0 h 1519634"/>
+              <a:gd name="connsiteX0" fmla="*/ 12198096 w 12198096"/>
+              <a:gd name="connsiteY0" fmla="*/ 0 h 1325451"/>
+              <a:gd name="connsiteX1" fmla="*/ 12192000 w 12198096"/>
+              <a:gd name="connsiteY1" fmla="*/ 1325451 h 1325451"/>
+              <a:gd name="connsiteX2" fmla="*/ 0 w 12198096"/>
+              <a:gd name="connsiteY2" fmla="*/ 1325451 h 1325451"/>
+              <a:gd name="connsiteX3" fmla="*/ 3810 w 12198096"/>
+              <a:gd name="connsiteY3" fmla="*/ 434491 h 1325451"/>
+              <a:gd name="connsiteX4" fmla="*/ 5319640 w 12198096"/>
+              <a:gd name="connsiteY4" fmla="*/ 1033551 h 1325451"/>
+              <a:gd name="connsiteX5" fmla="*/ 12198096 w 12198096"/>
+              <a:gd name="connsiteY5" fmla="*/ 0 h 1325451"/>
+              <a:gd name="connsiteX0" fmla="*/ 12198096 w 12198096"/>
+              <a:gd name="connsiteY0" fmla="*/ 0 h 1325451"/>
+              <a:gd name="connsiteX1" fmla="*/ 12192000 w 12198096"/>
+              <a:gd name="connsiteY1" fmla="*/ 1325451 h 1325451"/>
+              <a:gd name="connsiteX2" fmla="*/ 0 w 12198096"/>
+              <a:gd name="connsiteY2" fmla="*/ 1325451 h 1325451"/>
+              <a:gd name="connsiteX3" fmla="*/ 3810 w 12198096"/>
+              <a:gd name="connsiteY3" fmla="*/ 434491 h 1325451"/>
+              <a:gd name="connsiteX4" fmla="*/ 5325736 w 12198096"/>
+              <a:gd name="connsiteY4" fmla="*/ 978070 h 1325451"/>
+              <a:gd name="connsiteX5" fmla="*/ 12198096 w 12198096"/>
+              <a:gd name="connsiteY5" fmla="*/ 0 h 1325451"/>
+            </a:gdLst>
+            <a:ahLst/>
+            <a:cxnLst>
+              <a:cxn ang="0">
+                <a:pos x="connsiteX0" y="connsiteY0"/>
+              </a:cxn>
+              <a:cxn ang="0">
+                <a:pos x="connsiteX1" y="connsiteY1"/>
+              </a:cxn>
+              <a:cxn ang="0">
+                <a:pos x="connsiteX2" y="connsiteY2"/>
+              </a:cxn>
+              <a:cxn ang="0">
+                <a:pos x="connsiteX3" y="connsiteY3"/>
+              </a:cxn>
+              <a:cxn ang="0">
+                <a:pos x="connsiteX4" y="connsiteY4"/>
+              </a:cxn>
+              <a:cxn ang="0">
+                <a:pos x="connsiteX5" y="connsiteY5"/>
+              </a:cxn>
+            </a:cxnLst>
+            <a:rect l="l" t="t" r="r" b="b"/>
+            <a:pathLst>
+              <a:path w="12198096" h="1325451">
+                <a:moveTo>
+                  <a:pt x="12198096" y="0"/>
+                </a:moveTo>
+                <a:lnTo>
+                  <a:pt x="12192000" y="1325451"/>
+                </a:lnTo>
+                <a:lnTo>
+                  <a:pt x="0" y="1325451"/>
+                </a:lnTo>
+                <a:lnTo>
+                  <a:pt x="3810" y="434491"/>
+                </a:lnTo>
+                <a:cubicBezTo>
+                  <a:pt x="1718603" y="876908"/>
+                  <a:pt x="3533473" y="963319"/>
+                  <a:pt x="5325736" y="978070"/>
+                </a:cubicBezTo>
+                <a:cubicBezTo>
+                  <a:pt x="7351518" y="925603"/>
+                  <a:pt x="10633603" y="731550"/>
+                  <a:pt x="12198096" y="0"/>
+                </a:cubicBezTo>
+                <a:close/>
+              </a:path>
+            </a:pathLst>
+          </a:custGeom>
+          <a:gradFill flip="none" rotWithShape="1">
+            <a:gsLst>
+              <a:gs pos="60000">
+                <a:srgbClr val="A0D2B4">
+                  <a:alpha val="50000"/>
+                </a:srgbClr>
+              </a:gs>
+              <a:gs pos="0">
+                <a:srgbClr val="008A41">
+                  <a:alpha val="70000"/>
+                </a:srgbClr>
+              </a:gs>
+              <a:gs pos="100000">
+                <a:srgbClr val="A0D2B4">
+                  <a:alpha val="50000"/>
+                </a:srgbClr>
+              </a:gs>
+            </a:gsLst>
+            <a:lin ang="10800000" scaled="0"/>
+            <a:tileRect/>
+          </a:gradFill>
+          <a:ln>
+            <a:noFill/>
+          </a:ln>
+        </p:spPr>
+        <p:style>
+          <a:lnRef idx="2">
+            <a:schemeClr val="accent1">
+              <a:shade val="50000"/>
+            </a:schemeClr>
+          </a:lnRef>
+          <a:fillRef idx="1">
+            <a:schemeClr val="accent1"/>
+          </a:fillRef>
+          <a:effectRef idx="0">
+            <a:schemeClr val="accent1"/>
+          </a:effectRef>
+          <a:fontRef idx="minor">
+            <a:schemeClr val="lt1"/>
+          </a:fontRef>
+        </p:style>
+        <p:txBody>
+          <a:bodyPr rtlCol="0" anchor="ctr"/>
+          <a:lstStyle/>
+          <a:p>
+            <a:pPr lvl="0" algn="ctr"/>
+            <a:endParaRPr lang="zh-CN" altLang="en-US"/>
+          </a:p>
+        </p:txBody>
+      </p:sp>
+      <p:pic>
+        <p:nvPicPr>
+          <p:cNvPr id="5" name="图片 4">
+            <a:extLst>
+              <a:ext uri="{FF2B5EF4-FFF2-40B4-BE49-F238E27FC236}">
+                <a16:creationId xmlns:a16="http://schemas.microsoft.com/office/drawing/2014/main" id="{13DD7BBD-37F2-F5B5-3DB5-69972F70E138}"/>
+              </a:ext>
+            </a:extLst>
+          </p:cNvPr>
+          <p:cNvPicPr>
+            <a:picLocks noChangeAspect="1"/>
+          </p:cNvPicPr>
+          <p:nvPr userDrawn="1"/>
+        </p:nvPicPr>
+        <p:blipFill>
+          <a:blip r:embed="rId2" cstate="print">
+            <a:extLst>
+              <a:ext uri="{BEBA8EAE-BF5A-486C-A8C5-ECC9F3942E4B}">
+                <a14:imgProps xmlns:a14="http://schemas.microsoft.com/office/drawing/2010/main">
+                  <a14:imgLayer r:embed="rId3">
+                    <a14:imgEffect>
+                      <a14:backgroundRemoval t="3090" b="89888" l="2563" r="97313">
+                        <a14:foregroundMark x1="7187" y1="50562" x2="61563" y2="38764"/>
+                        <a14:foregroundMark x1="61563" y1="38764" x2="63438" y2="41292"/>
+                        <a14:foregroundMark x1="29875" y1="86798" x2="41313" y2="84551"/>
+                        <a14:foregroundMark x1="41313" y1="84551" x2="57375" y2="89607"/>
+                        <a14:foregroundMark x1="57375" y1="89607" x2="63438" y2="85112"/>
+                        <a14:foregroundMark x1="63438" y1="85112" x2="64063" y2="85112"/>
+                        <a14:foregroundMark x1="22250" y1="25843" x2="23375" y2="34831"/>
+                        <a14:foregroundMark x1="22375" y1="26124" x2="26438" y2="23876"/>
+                        <a14:foregroundMark x1="26438" y1="23876" x2="28688" y2="24438"/>
+                        <a14:foregroundMark x1="22313" y1="23315" x2="28750" y2="25562"/>
+                        <a14:foregroundMark x1="68313" y1="24157" x2="68313" y2="24157"/>
+                        <a14:foregroundMark x1="68375" y1="70506" x2="68375" y2="70506"/>
+                        <a14:foregroundMark x1="68063" y1="61236" x2="68063" y2="61236"/>
+                        <a14:foregroundMark x1="83438" y1="31180" x2="87688" y2="19382"/>
+                        <a14:foregroundMark x1="87688" y1="19382" x2="91813" y2="23315"/>
+                        <a14:foregroundMark x1="91813" y1="23315" x2="95063" y2="37079"/>
+                        <a14:foregroundMark x1="95063" y1="37079" x2="95188" y2="56461"/>
+                        <a14:foregroundMark x1="95188" y1="56461" x2="91188" y2="72753"/>
+                        <a14:foregroundMark x1="91188" y1="72753" x2="86438" y2="75562"/>
+                        <a14:foregroundMark x1="86438" y1="75562" x2="82438" y2="60393"/>
+                        <a14:foregroundMark x1="82438" y1="60393" x2="82125" y2="40449"/>
+                        <a14:foregroundMark x1="82125" y1="40449" x2="83813" y2="29213"/>
+                        <a14:foregroundMark x1="85688" y1="46910" x2="91313" y2="42416"/>
+                        <a14:foregroundMark x1="84500" y1="41854" x2="89125" y2="45506"/>
+                        <a14:foregroundMark x1="89125" y1="45506" x2="89313" y2="66573"/>
+                        <a14:foregroundMark x1="89313" y1="66573" x2="85375" y2="56742"/>
+                        <a14:foregroundMark x1="85375" y1="56742" x2="86188" y2="33427"/>
+                        <a14:foregroundMark x1="86188" y1="33427" x2="89625" y2="23315"/>
+                        <a14:foregroundMark x1="89625" y1="23315" x2="93063" y2="58146"/>
+                        <a14:foregroundMark x1="93063" y1="58146" x2="92625" y2="60955"/>
+                        <a14:foregroundMark x1="83250" y1="28933" x2="87125" y2="18539"/>
+                        <a14:foregroundMark x1="87125" y1="18539" x2="92063" y2="21629"/>
+                        <a14:foregroundMark x1="92063" y1="21629" x2="95063" y2="33989"/>
+                        <a14:foregroundMark x1="95063" y1="33989" x2="95875" y2="52247"/>
+                        <a14:foregroundMark x1="95875" y1="52247" x2="92688" y2="71910"/>
+                        <a14:foregroundMark x1="92688" y1="71910" x2="89188" y2="80337"/>
+                        <a14:foregroundMark x1="89188" y1="80337" x2="84125" y2="70787"/>
+                        <a14:foregroundMark x1="84125" y1="70787" x2="81313" y2="53371"/>
+                        <a14:foregroundMark x1="81313" y1="53371" x2="81875" y2="39607"/>
+                        <a14:foregroundMark x1="60250" y1="39888" x2="58125" y2="37079"/>
+                        <a14:foregroundMark x1="67625" y1="32022" x2="69313" y2="53090"/>
+                        <a14:foregroundMark x1="69313" y1="53090" x2="75000" y2="35674"/>
+                        <a14:foregroundMark x1="75000" y1="35674" x2="68813" y2="40449"/>
+                        <a14:foregroundMark x1="68813" y1="40449" x2="69000" y2="21629"/>
+                        <a14:foregroundMark x1="69000" y1="21629" x2="74250" y2="16292"/>
+                        <a14:foregroundMark x1="74250" y1="16292" x2="78563" y2="24719"/>
+                        <a14:foregroundMark x1="78563" y1="24719" x2="80063" y2="46348"/>
+                        <a14:foregroundMark x1="80063" y1="46348" x2="75813" y2="71067"/>
+                        <a14:foregroundMark x1="75813" y1="71067" x2="70438" y2="74719"/>
+                        <a14:foregroundMark x1="70438" y1="74719" x2="77063" y2="69944"/>
+                        <a14:foregroundMark x1="77063" y1="69944" x2="72313" y2="77528"/>
+                        <a14:foregroundMark x1="72313" y1="77528" x2="67500" y2="53090"/>
+                        <a14:foregroundMark x1="67500" y1="53090" x2="68063" y2="72753"/>
+                        <a14:foregroundMark x1="68063" y1="72753" x2="69000" y2="77528"/>
+                        <a14:foregroundMark x1="70688" y1="76685" x2="72438" y2="80056"/>
+                        <a14:foregroundMark x1="73750" y1="78371" x2="75688" y2="78652"/>
+                        <a14:foregroundMark x1="70813" y1="78090" x2="72063" y2="73876"/>
+                        <a14:foregroundMark x1="5407" y1="21913" x2="10063" y2="20506"/>
+                        <a14:foregroundMark x1="10063" y1="20506" x2="33938" y2="20506"/>
+                        <a14:foregroundMark x1="33938" y1="20506" x2="53813" y2="11798"/>
+                        <a14:foregroundMark x1="53813" y1="11798" x2="64813" y2="15449"/>
+                        <a14:foregroundMark x1="64813" y1="15449" x2="67750" y2="43539"/>
+                        <a14:foregroundMark x1="67750" y1="43539" x2="67750" y2="73876"/>
+                        <a14:foregroundMark x1="67750" y1="73876" x2="59750" y2="97753"/>
+                        <a14:foregroundMark x1="59750" y1="97753" x2="40250" y2="95506"/>
+                        <a14:foregroundMark x1="40250" y1="95506" x2="9375" y2="72753"/>
+                        <a14:foregroundMark x1="9375" y1="72753" x2="5309" y2="63916"/>
+                        <a14:foregroundMark x1="10125" y1="10955" x2="11750" y2="27528"/>
+                        <a14:foregroundMark x1="11750" y1="27528" x2="9125" y2="14045"/>
+                        <a14:foregroundMark x1="9125" y1="14045" x2="13188" y2="16011"/>
+                        <a14:foregroundMark x1="86698" y1="5849" x2="92049" y2="12903"/>
+                        <a14:foregroundMark x1="97370" y1="25565" x2="99688" y2="49719"/>
+                        <a14:foregroundMark x1="99688" y1="49719" x2="98188" y2="69101"/>
+                        <a14:foregroundMark x1="98188" y1="69101" x2="93563" y2="85112"/>
+                        <a14:foregroundMark x1="93563" y1="85112" x2="55688" y2="99719"/>
+                        <a14:foregroundMark x1="55688" y1="99719" x2="7164" y2="90806"/>
+                        <a14:foregroundMark x1="5404" y1="20395" x2="5750" y2="17978"/>
+                        <a14:foregroundMark x1="5750" y1="17978" x2="44938" y2="2528"/>
+                        <a14:foregroundMark x1="44938" y1="2528" x2="90875" y2="24438"/>
+                        <a14:foregroundMark x1="90875" y1="24438" x2="80938" y2="14607"/>
+                        <a14:foregroundMark x1="80938" y1="14607" x2="81099" y2="13463"/>
+                        <a14:foregroundMark x1="68750" y1="12360" x2="78063" y2="17135"/>
+                        <a14:foregroundMark x1="78063" y1="17135" x2="87938" y2="14607"/>
+                        <a14:foregroundMark x1="87938" y1="14607" x2="93500" y2="20506"/>
+                        <a14:foregroundMark x1="93500" y1="20506" x2="97500" y2="30618"/>
+                        <a14:foregroundMark x1="97500" y1="30618" x2="97313" y2="59831"/>
+                        <a14:foregroundMark x1="97313" y1="59831" x2="89563" y2="72753"/>
+                        <a14:foregroundMark x1="89563" y1="72753" x2="79813" y2="68258"/>
+                        <a14:foregroundMark x1="79813" y1="68258" x2="69438" y2="31180"/>
+                        <a14:foregroundMark x1="69438" y1="31180" x2="68688" y2="12921"/>
+                        <a14:foregroundMark x1="68688" y1="12921" x2="68688" y2="12640"/>
+                        <a14:foregroundMark x1="5938" y1="33708" x2="6750" y2="79213"/>
+                        <a14:backgroundMark x1="95264" y1="19646" x2="99063" y2="22472"/>
+                        <a14:backgroundMark x1="72250" y1="2528" x2="84419" y2="11579"/>
+                        <a14:backgroundMark x1="99063" y1="22472" x2="99563" y2="1685"/>
+                        <a14:backgroundMark x1="99563" y1="1685" x2="71625" y2="1966"/>
+                        <a14:backgroundMark x1="563" y1="11236" x2="6375" y2="95506"/>
+                        <a14:backgroundMark x1="3125" y1="64607" x2="4500" y2="85112"/>
+                        <a14:backgroundMark x1="2313" y1="66573" x2="3375" y2="64607"/>
+                        <a14:backgroundMark x1="313" y1="17416" x2="625" y2="98315"/>
+                        <a14:backgroundMark x1="1188" y1="19382" x2="4313" y2="98596"/>
+                        <a14:backgroundMark x1="2750" y1="26685" x2="3125" y2="37079"/>
+                        <a14:backgroundMark x1="1750" y1="19382" x2="4500" y2="38483"/>
+                        <a14:backgroundMark x1="1750" y1="15449" x2="1750" y2="15449"/>
+                        <a14:backgroundMark x1="1750" y1="17135" x2="4313" y2="37640"/>
+                        <a14:backgroundMark x1="1875" y1="21910" x2="3938" y2="26966"/>
+                        <a14:backgroundMark x1="4313" y1="3371" x2="4375" y2="39888"/>
+                      </a14:backgroundRemoval>
+                    </a14:imgEffect>
+                  </a14:imgLayer>
+                </a14:imgProps>
+              </a:ext>
+              <a:ext uri="{28A0092B-C50C-407E-A947-70E740481C1C}">
+                <a14:useLocalDpi xmlns:a14="http://schemas.microsoft.com/office/drawing/2010/main" val="0"/>
+              </a:ext>
+            </a:extLst>
+          </a:blip>
+          <a:stretch>
+            <a:fillRect/>
+          </a:stretch>
+        </p:blipFill>
+        <p:spPr>
+          <a:xfrm>
+            <a:off x="5914739" y="183848"/>
+            <a:ext cx="3223157" cy="717152"/>
+          </a:xfrm>
+          <a:prstGeom prst="rect">
+            <a:avLst/>
+          </a:prstGeom>
+        </p:spPr>
+      </p:pic>
     </p:spTree>
   </p:cSld>
   <p:clrMapOvr>
@@ -2047,370 +3041,6 @@
 </file>
 
 <file path=ppt/slideLayouts/slideLayout10.xml><?xml version="1.0" encoding="utf-8"?>
-<p:sldLayout xmlns:a="http://schemas.openxmlformats.org/drawingml/2006/main" xmlns:r="http://schemas.openxmlformats.org/officeDocument/2006/relationships" xmlns:p="http://schemas.openxmlformats.org/presentationml/2006/main" matchingName="Big number">
-  <p:cSld name="BIG_NUMBER">
-    <p:spTree>
-      <p:nvGrpSpPr>
-        <p:cNvPr id="1" name="Shape 44"/>
-        <p:cNvGrpSpPr/>
-        <p:nvPr/>
-      </p:nvGrpSpPr>
-      <p:grpSpPr>
-        <a:xfrm>
-          <a:off x="0" y="0"/>
-          <a:ext cx="0" cy="0"/>
-          <a:chOff x="0" y="0"/>
-          <a:chExt cx="0" cy="0"/>
-        </a:xfrm>
-      </p:grpSpPr>
-      <p:sp>
-        <p:nvSpPr>
-          <p:cNvPr id="45" name="Google Shape;45;p11"/>
-          <p:cNvSpPr txBox="1">
-            <a:spLocks noGrp="1"/>
-          </p:cNvSpPr>
-          <p:nvPr>
-            <p:ph type="title" hasCustomPrompt="1"/>
-          </p:nvPr>
-        </p:nvSpPr>
-        <p:spPr>
-          <a:xfrm>
-            <a:off x="311700" y="1106125"/>
-            <a:ext cx="8520600" cy="1963500"/>
-          </a:xfrm>
-          <a:prstGeom prst="rect">
-            <a:avLst/>
-          </a:prstGeom>
-        </p:spPr>
-        <p:txBody>
-          <a:bodyPr spcFirstLastPara="1" wrap="square" lIns="91425" tIns="91425" rIns="91425" bIns="91425" anchor="b" anchorCtr="0">
-            <a:normAutofit/>
-          </a:bodyPr>
-          <a:lstStyle>
-            <a:lvl1pPr lvl="0" algn="ctr">
-              <a:spcBef>
-                <a:spcPts val="0"/>
-              </a:spcBef>
-              <a:spcAft>
-                <a:spcPts val="0"/>
-              </a:spcAft>
-              <a:buSzPts val="12000"/>
-              <a:buNone/>
-              <a:defRPr sz="12000"/>
-            </a:lvl1pPr>
-            <a:lvl2pPr lvl="1" algn="ctr">
-              <a:spcBef>
-                <a:spcPts val="0"/>
-              </a:spcBef>
-              <a:spcAft>
-                <a:spcPts val="0"/>
-              </a:spcAft>
-              <a:buSzPts val="12000"/>
-              <a:buNone/>
-              <a:defRPr sz="12000"/>
-            </a:lvl2pPr>
-            <a:lvl3pPr lvl="2" algn="ctr">
-              <a:spcBef>
-                <a:spcPts val="0"/>
-              </a:spcBef>
-              <a:spcAft>
-                <a:spcPts val="0"/>
-              </a:spcAft>
-              <a:buSzPts val="12000"/>
-              <a:buNone/>
-              <a:defRPr sz="12000"/>
-            </a:lvl3pPr>
-            <a:lvl4pPr lvl="3" algn="ctr">
-              <a:spcBef>
-                <a:spcPts val="0"/>
-              </a:spcBef>
-              <a:spcAft>
-                <a:spcPts val="0"/>
-              </a:spcAft>
-              <a:buSzPts val="12000"/>
-              <a:buNone/>
-              <a:defRPr sz="12000"/>
-            </a:lvl4pPr>
-            <a:lvl5pPr lvl="4" algn="ctr">
-              <a:spcBef>
-                <a:spcPts val="0"/>
-              </a:spcBef>
-              <a:spcAft>
-                <a:spcPts val="0"/>
-              </a:spcAft>
-              <a:buSzPts val="12000"/>
-              <a:buNone/>
-              <a:defRPr sz="12000"/>
-            </a:lvl5pPr>
-            <a:lvl6pPr lvl="5" algn="ctr">
-              <a:spcBef>
-                <a:spcPts val="0"/>
-              </a:spcBef>
-              <a:spcAft>
-                <a:spcPts val="0"/>
-              </a:spcAft>
-              <a:buSzPts val="12000"/>
-              <a:buNone/>
-              <a:defRPr sz="12000"/>
-            </a:lvl6pPr>
-            <a:lvl7pPr lvl="6" algn="ctr">
-              <a:spcBef>
-                <a:spcPts val="0"/>
-              </a:spcBef>
-              <a:spcAft>
-                <a:spcPts val="0"/>
-              </a:spcAft>
-              <a:buSzPts val="12000"/>
-              <a:buNone/>
-              <a:defRPr sz="12000"/>
-            </a:lvl7pPr>
-            <a:lvl8pPr lvl="7" algn="ctr">
-              <a:spcBef>
-                <a:spcPts val="0"/>
-              </a:spcBef>
-              <a:spcAft>
-                <a:spcPts val="0"/>
-              </a:spcAft>
-              <a:buSzPts val="12000"/>
-              <a:buNone/>
-              <a:defRPr sz="12000"/>
-            </a:lvl8pPr>
-            <a:lvl9pPr lvl="8" algn="ctr">
-              <a:spcBef>
-                <a:spcPts val="0"/>
-              </a:spcBef>
-              <a:spcAft>
-                <a:spcPts val="0"/>
-              </a:spcAft>
-              <a:buSzPts val="12000"/>
-              <a:buNone/>
-              <a:defRPr sz="12000"/>
-            </a:lvl9pPr>
-          </a:lstStyle>
-          <a:p>
-            <a:r>
-              <a:t>xx%</a:t>
-            </a:r>
-          </a:p>
-        </p:txBody>
-      </p:sp>
-      <p:sp>
-        <p:nvSpPr>
-          <p:cNvPr id="46" name="Google Shape;46;p11"/>
-          <p:cNvSpPr txBox="1">
-            <a:spLocks noGrp="1"/>
-          </p:cNvSpPr>
-          <p:nvPr>
-            <p:ph type="body" idx="1"/>
-          </p:nvPr>
-        </p:nvSpPr>
-        <p:spPr>
-          <a:xfrm>
-            <a:off x="311700" y="3152225"/>
-            <a:ext cx="8520600" cy="1300800"/>
-          </a:xfrm>
-          <a:prstGeom prst="rect">
-            <a:avLst/>
-          </a:prstGeom>
-        </p:spPr>
-        <p:txBody>
-          <a:bodyPr spcFirstLastPara="1" wrap="square" lIns="91425" tIns="91425" rIns="91425" bIns="91425" anchor="t" anchorCtr="0">
-            <a:normAutofit/>
-          </a:bodyPr>
-          <a:lstStyle>
-            <a:lvl1pPr marL="457200" lvl="0" indent="-342900" algn="ctr">
-              <a:spcBef>
-                <a:spcPts val="0"/>
-              </a:spcBef>
-              <a:spcAft>
-                <a:spcPts val="0"/>
-              </a:spcAft>
-              <a:buSzPts val="1800"/>
-              <a:buChar char="●"/>
-              <a:defRPr/>
-            </a:lvl1pPr>
-            <a:lvl2pPr marL="914400" lvl="1" indent="-317500" algn="ctr">
-              <a:spcBef>
-                <a:spcPts val="0"/>
-              </a:spcBef>
-              <a:spcAft>
-                <a:spcPts val="0"/>
-              </a:spcAft>
-              <a:buSzPts val="1400"/>
-              <a:buChar char="○"/>
-              <a:defRPr/>
-            </a:lvl2pPr>
-            <a:lvl3pPr marL="1371600" lvl="2" indent="-317500" algn="ctr">
-              <a:spcBef>
-                <a:spcPts val="0"/>
-              </a:spcBef>
-              <a:spcAft>
-                <a:spcPts val="0"/>
-              </a:spcAft>
-              <a:buSzPts val="1400"/>
-              <a:buChar char="■"/>
-              <a:defRPr/>
-            </a:lvl3pPr>
-            <a:lvl4pPr marL="1828800" lvl="3" indent="-317500" algn="ctr">
-              <a:spcBef>
-                <a:spcPts val="0"/>
-              </a:spcBef>
-              <a:spcAft>
-                <a:spcPts val="0"/>
-              </a:spcAft>
-              <a:buSzPts val="1400"/>
-              <a:buChar char="●"/>
-              <a:defRPr/>
-            </a:lvl4pPr>
-            <a:lvl5pPr marL="2286000" lvl="4" indent="-317500" algn="ctr">
-              <a:spcBef>
-                <a:spcPts val="0"/>
-              </a:spcBef>
-              <a:spcAft>
-                <a:spcPts val="0"/>
-              </a:spcAft>
-              <a:buSzPts val="1400"/>
-              <a:buChar char="○"/>
-              <a:defRPr/>
-            </a:lvl5pPr>
-            <a:lvl6pPr marL="2743200" lvl="5" indent="-317500" algn="ctr">
-              <a:spcBef>
-                <a:spcPts val="0"/>
-              </a:spcBef>
-              <a:spcAft>
-                <a:spcPts val="0"/>
-              </a:spcAft>
-              <a:buSzPts val="1400"/>
-              <a:buChar char="■"/>
-              <a:defRPr/>
-            </a:lvl6pPr>
-            <a:lvl7pPr marL="3200400" lvl="6" indent="-317500" algn="ctr">
-              <a:spcBef>
-                <a:spcPts val="0"/>
-              </a:spcBef>
-              <a:spcAft>
-                <a:spcPts val="0"/>
-              </a:spcAft>
-              <a:buSzPts val="1400"/>
-              <a:buChar char="●"/>
-              <a:defRPr/>
-            </a:lvl7pPr>
-            <a:lvl8pPr marL="3657600" lvl="7" indent="-317500" algn="ctr">
-              <a:spcBef>
-                <a:spcPts val="0"/>
-              </a:spcBef>
-              <a:spcAft>
-                <a:spcPts val="0"/>
-              </a:spcAft>
-              <a:buSzPts val="1400"/>
-              <a:buChar char="○"/>
-              <a:defRPr/>
-            </a:lvl8pPr>
-            <a:lvl9pPr marL="4114800" lvl="8" indent="-317500" algn="ctr">
-              <a:spcBef>
-                <a:spcPts val="0"/>
-              </a:spcBef>
-              <a:spcAft>
-                <a:spcPts val="0"/>
-              </a:spcAft>
-              <a:buSzPts val="1400"/>
-              <a:buChar char="■"/>
-              <a:defRPr/>
-            </a:lvl9pPr>
-          </a:lstStyle>
-          <a:p>
-            <a:endParaRPr/>
-          </a:p>
-        </p:txBody>
-      </p:sp>
-      <p:sp>
-        <p:nvSpPr>
-          <p:cNvPr id="47" name="Google Shape;47;p11"/>
-          <p:cNvSpPr txBox="1">
-            <a:spLocks noGrp="1"/>
-          </p:cNvSpPr>
-          <p:nvPr>
-            <p:ph type="sldNum" idx="12"/>
-          </p:nvPr>
-        </p:nvSpPr>
-        <p:spPr>
-          <a:xfrm>
-            <a:off x="8472458" y="4663217"/>
-            <a:ext cx="548700" cy="393600"/>
-          </a:xfrm>
-          <a:prstGeom prst="rect">
-            <a:avLst/>
-          </a:prstGeom>
-        </p:spPr>
-        <p:txBody>
-          <a:bodyPr spcFirstLastPara="1" wrap="square" lIns="91425" tIns="91425" rIns="91425" bIns="91425" anchor="ctr" anchorCtr="0">
-            <a:normAutofit/>
-          </a:bodyPr>
-          <a:lstStyle>
-            <a:lvl1pPr lvl="0">
-              <a:buNone/>
-              <a:defRPr/>
-            </a:lvl1pPr>
-            <a:lvl2pPr lvl="1">
-              <a:buNone/>
-              <a:defRPr/>
-            </a:lvl2pPr>
-            <a:lvl3pPr lvl="2">
-              <a:buNone/>
-              <a:defRPr/>
-            </a:lvl3pPr>
-            <a:lvl4pPr lvl="3">
-              <a:buNone/>
-              <a:defRPr/>
-            </a:lvl4pPr>
-            <a:lvl5pPr lvl="4">
-              <a:buNone/>
-              <a:defRPr/>
-            </a:lvl5pPr>
-            <a:lvl6pPr lvl="5">
-              <a:buNone/>
-              <a:defRPr/>
-            </a:lvl6pPr>
-            <a:lvl7pPr lvl="6">
-              <a:buNone/>
-              <a:defRPr/>
-            </a:lvl7pPr>
-            <a:lvl8pPr lvl="7">
-              <a:buNone/>
-              <a:defRPr/>
-            </a:lvl8pPr>
-            <a:lvl9pPr lvl="8">
-              <a:buNone/>
-              <a:defRPr/>
-            </a:lvl9pPr>
-          </a:lstStyle>
-          <a:p>
-            <a:pPr marL="0" lvl="0" indent="0" algn="r" rtl="0">
-              <a:spcBef>
-                <a:spcPts val="0"/>
-              </a:spcBef>
-              <a:spcAft>
-                <a:spcPts val="0"/>
-              </a:spcAft>
-              <a:buNone/>
-            </a:pPr>
-            <a:fld id="{00000000-1234-1234-1234-123412341234}" type="slidenum">
-              <a:rPr lang="en-GB"/>
-              <a:t>‹#›</a:t>
-            </a:fld>
-            <a:endParaRPr lang="en-GB"/>
-          </a:p>
-        </p:txBody>
-      </p:sp>
-    </p:spTree>
-  </p:cSld>
-  <p:clrMapOvr>
-    <a:masterClrMapping/>
-  </p:clrMapOvr>
-</p:sldLayout>
-</file>
-
-<file path=ppt/slideLayouts/slideLayout11.xml><?xml version="1.0" encoding="utf-8"?>
 <p:sldLayout xmlns:a="http://schemas.openxmlformats.org/drawingml/2006/main" xmlns:r="http://schemas.openxmlformats.org/officeDocument/2006/relationships" xmlns:p="http://schemas.openxmlformats.org/presentationml/2006/main" matchingName="Blank" type="blank">
   <p:cSld name="BLANK">
     <p:spTree>
@@ -2515,240 +3145,7 @@
 </file>
 
 <file path=ppt/slideLayouts/slideLayout2.xml><?xml version="1.0" encoding="utf-8"?>
-<p:sldLayout xmlns:a="http://schemas.openxmlformats.org/drawingml/2006/main" xmlns:r="http://schemas.openxmlformats.org/officeDocument/2006/relationships" xmlns:p="http://schemas.openxmlformats.org/presentationml/2006/main" matchingName="Section header" type="secHead">
-  <p:cSld name="SECTION_HEADER">
-    <p:spTree>
-      <p:nvGrpSpPr>
-        <p:cNvPr id="1" name="Shape 13"/>
-        <p:cNvGrpSpPr/>
-        <p:nvPr/>
-      </p:nvGrpSpPr>
-      <p:grpSpPr>
-        <a:xfrm>
-          <a:off x="0" y="0"/>
-          <a:ext cx="0" cy="0"/>
-          <a:chOff x="0" y="0"/>
-          <a:chExt cx="0" cy="0"/>
-        </a:xfrm>
-      </p:grpSpPr>
-      <p:sp>
-        <p:nvSpPr>
-          <p:cNvPr id="14" name="Google Shape;14;p3"/>
-          <p:cNvSpPr txBox="1">
-            <a:spLocks noGrp="1"/>
-          </p:cNvSpPr>
-          <p:nvPr>
-            <p:ph type="title"/>
-          </p:nvPr>
-        </p:nvSpPr>
-        <p:spPr>
-          <a:xfrm>
-            <a:off x="311700" y="2150850"/>
-            <a:ext cx="8520600" cy="841800"/>
-          </a:xfrm>
-          <a:prstGeom prst="rect">
-            <a:avLst/>
-          </a:prstGeom>
-        </p:spPr>
-        <p:txBody>
-          <a:bodyPr spcFirstLastPara="1" wrap="square" lIns="91425" tIns="91425" rIns="91425" bIns="91425" anchor="ctr" anchorCtr="0">
-            <a:normAutofit/>
-          </a:bodyPr>
-          <a:lstStyle>
-            <a:lvl1pPr lvl="0" algn="ctr">
-              <a:spcBef>
-                <a:spcPts val="0"/>
-              </a:spcBef>
-              <a:spcAft>
-                <a:spcPts val="0"/>
-              </a:spcAft>
-              <a:buSzPts val="3600"/>
-              <a:buNone/>
-              <a:defRPr sz="3600"/>
-            </a:lvl1pPr>
-            <a:lvl2pPr lvl="1" algn="ctr">
-              <a:spcBef>
-                <a:spcPts val="0"/>
-              </a:spcBef>
-              <a:spcAft>
-                <a:spcPts val="0"/>
-              </a:spcAft>
-              <a:buSzPts val="3600"/>
-              <a:buNone/>
-              <a:defRPr sz="3600"/>
-            </a:lvl2pPr>
-            <a:lvl3pPr lvl="2" algn="ctr">
-              <a:spcBef>
-                <a:spcPts val="0"/>
-              </a:spcBef>
-              <a:spcAft>
-                <a:spcPts val="0"/>
-              </a:spcAft>
-              <a:buSzPts val="3600"/>
-              <a:buNone/>
-              <a:defRPr sz="3600"/>
-            </a:lvl3pPr>
-            <a:lvl4pPr lvl="3" algn="ctr">
-              <a:spcBef>
-                <a:spcPts val="0"/>
-              </a:spcBef>
-              <a:spcAft>
-                <a:spcPts val="0"/>
-              </a:spcAft>
-              <a:buSzPts val="3600"/>
-              <a:buNone/>
-              <a:defRPr sz="3600"/>
-            </a:lvl4pPr>
-            <a:lvl5pPr lvl="4" algn="ctr">
-              <a:spcBef>
-                <a:spcPts val="0"/>
-              </a:spcBef>
-              <a:spcAft>
-                <a:spcPts val="0"/>
-              </a:spcAft>
-              <a:buSzPts val="3600"/>
-              <a:buNone/>
-              <a:defRPr sz="3600"/>
-            </a:lvl5pPr>
-            <a:lvl6pPr lvl="5" algn="ctr">
-              <a:spcBef>
-                <a:spcPts val="0"/>
-              </a:spcBef>
-              <a:spcAft>
-                <a:spcPts val="0"/>
-              </a:spcAft>
-              <a:buSzPts val="3600"/>
-              <a:buNone/>
-              <a:defRPr sz="3600"/>
-            </a:lvl6pPr>
-            <a:lvl7pPr lvl="6" algn="ctr">
-              <a:spcBef>
-                <a:spcPts val="0"/>
-              </a:spcBef>
-              <a:spcAft>
-                <a:spcPts val="0"/>
-              </a:spcAft>
-              <a:buSzPts val="3600"/>
-              <a:buNone/>
-              <a:defRPr sz="3600"/>
-            </a:lvl7pPr>
-            <a:lvl8pPr lvl="7" algn="ctr">
-              <a:spcBef>
-                <a:spcPts val="0"/>
-              </a:spcBef>
-              <a:spcAft>
-                <a:spcPts val="0"/>
-              </a:spcAft>
-              <a:buSzPts val="3600"/>
-              <a:buNone/>
-              <a:defRPr sz="3600"/>
-            </a:lvl8pPr>
-            <a:lvl9pPr lvl="8" algn="ctr">
-              <a:spcBef>
-                <a:spcPts val="0"/>
-              </a:spcBef>
-              <a:spcAft>
-                <a:spcPts val="0"/>
-              </a:spcAft>
-              <a:buSzPts val="3600"/>
-              <a:buNone/>
-              <a:defRPr sz="3600"/>
-            </a:lvl9pPr>
-          </a:lstStyle>
-          <a:p>
-            <a:endParaRPr/>
-          </a:p>
-        </p:txBody>
-      </p:sp>
-      <p:sp>
-        <p:nvSpPr>
-          <p:cNvPr id="15" name="Google Shape;15;p3"/>
-          <p:cNvSpPr txBox="1">
-            <a:spLocks noGrp="1"/>
-          </p:cNvSpPr>
-          <p:nvPr>
-            <p:ph type="sldNum" idx="12"/>
-          </p:nvPr>
-        </p:nvSpPr>
-        <p:spPr>
-          <a:xfrm>
-            <a:off x="8472458" y="4663217"/>
-            <a:ext cx="548700" cy="393600"/>
-          </a:xfrm>
-          <a:prstGeom prst="rect">
-            <a:avLst/>
-          </a:prstGeom>
-        </p:spPr>
-        <p:txBody>
-          <a:bodyPr spcFirstLastPara="1" wrap="square" lIns="91425" tIns="91425" rIns="91425" bIns="91425" anchor="ctr" anchorCtr="0">
-            <a:normAutofit/>
-          </a:bodyPr>
-          <a:lstStyle>
-            <a:lvl1pPr lvl="0">
-              <a:buNone/>
-              <a:defRPr/>
-            </a:lvl1pPr>
-            <a:lvl2pPr lvl="1">
-              <a:buNone/>
-              <a:defRPr/>
-            </a:lvl2pPr>
-            <a:lvl3pPr lvl="2">
-              <a:buNone/>
-              <a:defRPr/>
-            </a:lvl3pPr>
-            <a:lvl4pPr lvl="3">
-              <a:buNone/>
-              <a:defRPr/>
-            </a:lvl4pPr>
-            <a:lvl5pPr lvl="4">
-              <a:buNone/>
-              <a:defRPr/>
-            </a:lvl5pPr>
-            <a:lvl6pPr lvl="5">
-              <a:buNone/>
-              <a:defRPr/>
-            </a:lvl6pPr>
-            <a:lvl7pPr lvl="6">
-              <a:buNone/>
-              <a:defRPr/>
-            </a:lvl7pPr>
-            <a:lvl8pPr lvl="7">
-              <a:buNone/>
-              <a:defRPr/>
-            </a:lvl8pPr>
-            <a:lvl9pPr lvl="8">
-              <a:buNone/>
-              <a:defRPr/>
-            </a:lvl9pPr>
-          </a:lstStyle>
-          <a:p>
-            <a:pPr marL="0" lvl="0" indent="0" algn="r" rtl="0">
-              <a:spcBef>
-                <a:spcPts val="0"/>
-              </a:spcBef>
-              <a:spcAft>
-                <a:spcPts val="0"/>
-              </a:spcAft>
-              <a:buNone/>
-            </a:pPr>
-            <a:fld id="{00000000-1234-1234-1234-123412341234}" type="slidenum">
-              <a:rPr lang="en-GB"/>
-              <a:t>‹#›</a:t>
-            </a:fld>
-            <a:endParaRPr lang="en-GB"/>
-          </a:p>
-        </p:txBody>
-      </p:sp>
-    </p:spTree>
-  </p:cSld>
-  <p:clrMapOvr>
-    <a:masterClrMapping/>
-  </p:clrMapOvr>
-</p:sldLayout>
-</file>
-
-<file path=ppt/slideLayouts/slideLayout3.xml><?xml version="1.0" encoding="utf-8"?>
-<p:sldLayout xmlns:a="http://schemas.openxmlformats.org/drawingml/2006/main" xmlns:r="http://schemas.openxmlformats.org/officeDocument/2006/relationships" xmlns:p="http://schemas.openxmlformats.org/presentationml/2006/main" matchingName="Title and body" type="tx">
+<p:sldLayout xmlns:a="http://schemas.openxmlformats.org/drawingml/2006/main" xmlns:r="http://schemas.openxmlformats.org/officeDocument/2006/relationships" xmlns:p="http://schemas.openxmlformats.org/presentationml/2006/main" matchingName="Title and body" userDrawn="1">
   <p:cSld name="TITLE_AND_BODY">
     <p:spTree>
       <p:nvGrpSpPr>
@@ -3022,85 +3419,772 @@
           </a:p>
         </p:txBody>
       </p:sp>
+      <p:cxnSp>
+        <p:nvCxnSpPr>
+          <p:cNvPr id="3" name="直接连接符 2">
+            <a:extLst>
+              <a:ext uri="{FF2B5EF4-FFF2-40B4-BE49-F238E27FC236}">
+                <a16:creationId xmlns:a16="http://schemas.microsoft.com/office/drawing/2014/main" id="{61B1C31B-ABB4-C231-8E74-06EF43C8452A}"/>
+              </a:ext>
+            </a:extLst>
+          </p:cNvPr>
+          <p:cNvCxnSpPr>
+            <a:cxnSpLocks/>
+          </p:cNvCxnSpPr>
+          <p:nvPr userDrawn="1"/>
+        </p:nvCxnSpPr>
+        <p:spPr>
+          <a:xfrm flipV="1">
+            <a:off x="659760" y="1105817"/>
+            <a:ext cx="8269829" cy="1"/>
+          </a:xfrm>
+          <a:prstGeom prst="line">
+            <a:avLst/>
+          </a:prstGeom>
+          <a:ln w="31750">
+            <a:solidFill>
+              <a:srgbClr val="008A41"/>
+            </a:solidFill>
+          </a:ln>
+        </p:spPr>
+        <p:style>
+          <a:lnRef idx="1">
+            <a:schemeClr val="accent1"/>
+          </a:lnRef>
+          <a:fillRef idx="0">
+            <a:schemeClr val="accent1"/>
+          </a:fillRef>
+          <a:effectRef idx="0">
+            <a:schemeClr val="accent1"/>
+          </a:effectRef>
+          <a:fontRef idx="minor">
+            <a:schemeClr val="tx1"/>
+          </a:fontRef>
+        </p:style>
+      </p:cxnSp>
       <p:sp>
         <p:nvSpPr>
-          <p:cNvPr id="19" name="Google Shape;19;p4"/>
-          <p:cNvSpPr txBox="1">
-            <a:spLocks noGrp="1"/>
-          </p:cNvSpPr>
-          <p:nvPr>
-            <p:ph type="sldNum" idx="12"/>
-          </p:nvPr>
+          <p:cNvPr id="4" name="矩形 7">
+            <a:extLst>
+              <a:ext uri="{FF2B5EF4-FFF2-40B4-BE49-F238E27FC236}">
+                <a16:creationId xmlns:a16="http://schemas.microsoft.com/office/drawing/2014/main" id="{CBFB4959-C109-52EA-0087-2D711A69F065}"/>
+              </a:ext>
+            </a:extLst>
+          </p:cNvPr>
+          <p:cNvSpPr/>
+          <p:nvPr userDrawn="1"/>
         </p:nvSpPr>
         <p:spPr>
+          <a:xfrm flipH="1">
+            <a:off x="0" y="4778374"/>
+            <a:ext cx="9144000" cy="388032"/>
+          </a:xfrm>
+          <a:custGeom>
+            <a:avLst/>
+            <a:gdLst>
+              <a:gd name="connsiteX0" fmla="*/ 0 w 12192000"/>
+              <a:gd name="connsiteY0" fmla="*/ 0 h 609599"/>
+              <a:gd name="connsiteX1" fmla="*/ 12192000 w 12192000"/>
+              <a:gd name="connsiteY1" fmla="*/ 0 h 609599"/>
+              <a:gd name="connsiteX2" fmla="*/ 12192000 w 12192000"/>
+              <a:gd name="connsiteY2" fmla="*/ 609599 h 609599"/>
+              <a:gd name="connsiteX3" fmla="*/ 0 w 12192000"/>
+              <a:gd name="connsiteY3" fmla="*/ 609599 h 609599"/>
+              <a:gd name="connsiteX4" fmla="*/ 0 w 12192000"/>
+              <a:gd name="connsiteY4" fmla="*/ 0 h 609599"/>
+              <a:gd name="connsiteX0" fmla="*/ 0 w 12192000"/>
+              <a:gd name="connsiteY0" fmla="*/ 548640 h 1158239"/>
+              <a:gd name="connsiteX1" fmla="*/ 12192000 w 12192000"/>
+              <a:gd name="connsiteY1" fmla="*/ 548640 h 1158239"/>
+              <a:gd name="connsiteX2" fmla="*/ 12192000 w 12192000"/>
+              <a:gd name="connsiteY2" fmla="*/ 1158239 h 1158239"/>
+              <a:gd name="connsiteX3" fmla="*/ 0 w 12192000"/>
+              <a:gd name="connsiteY3" fmla="*/ 1158239 h 1158239"/>
+              <a:gd name="connsiteX4" fmla="*/ 0 w 12192000"/>
+              <a:gd name="connsiteY4" fmla="*/ 548640 h 1158239"/>
+              <a:gd name="connsiteX0" fmla="*/ 0 w 12192000"/>
+              <a:gd name="connsiteY0" fmla="*/ 376700 h 986299"/>
+              <a:gd name="connsiteX1" fmla="*/ 12192000 w 12192000"/>
+              <a:gd name="connsiteY1" fmla="*/ 376700 h 986299"/>
+              <a:gd name="connsiteX2" fmla="*/ 12192000 w 12192000"/>
+              <a:gd name="connsiteY2" fmla="*/ 986299 h 986299"/>
+              <a:gd name="connsiteX3" fmla="*/ 0 w 12192000"/>
+              <a:gd name="connsiteY3" fmla="*/ 986299 h 986299"/>
+              <a:gd name="connsiteX4" fmla="*/ 0 w 12192000"/>
+              <a:gd name="connsiteY4" fmla="*/ 376700 h 986299"/>
+              <a:gd name="connsiteX0" fmla="*/ 0 w 12192000"/>
+              <a:gd name="connsiteY0" fmla="*/ 438928 h 1048527"/>
+              <a:gd name="connsiteX1" fmla="*/ 12192000 w 12192000"/>
+              <a:gd name="connsiteY1" fmla="*/ 438928 h 1048527"/>
+              <a:gd name="connsiteX2" fmla="*/ 12192000 w 12192000"/>
+              <a:gd name="connsiteY2" fmla="*/ 1048527 h 1048527"/>
+              <a:gd name="connsiteX3" fmla="*/ 0 w 12192000"/>
+              <a:gd name="connsiteY3" fmla="*/ 1048527 h 1048527"/>
+              <a:gd name="connsiteX4" fmla="*/ 0 w 12192000"/>
+              <a:gd name="connsiteY4" fmla="*/ 438928 h 1048527"/>
+              <a:gd name="connsiteX0" fmla="*/ 0 w 12192000"/>
+              <a:gd name="connsiteY0" fmla="*/ 181799 h 791398"/>
+              <a:gd name="connsiteX1" fmla="*/ 12192000 w 12192000"/>
+              <a:gd name="connsiteY1" fmla="*/ 181799 h 791398"/>
+              <a:gd name="connsiteX2" fmla="*/ 12192000 w 12192000"/>
+              <a:gd name="connsiteY2" fmla="*/ 791398 h 791398"/>
+              <a:gd name="connsiteX3" fmla="*/ 0 w 12192000"/>
+              <a:gd name="connsiteY3" fmla="*/ 791398 h 791398"/>
+              <a:gd name="connsiteX4" fmla="*/ 0 w 12192000"/>
+              <a:gd name="connsiteY4" fmla="*/ 181799 h 791398"/>
+              <a:gd name="connsiteX0" fmla="*/ 0 w 12192000"/>
+              <a:gd name="connsiteY0" fmla="*/ 187345 h 796944"/>
+              <a:gd name="connsiteX1" fmla="*/ 12192000 w 12192000"/>
+              <a:gd name="connsiteY1" fmla="*/ 187345 h 796944"/>
+              <a:gd name="connsiteX2" fmla="*/ 12192000 w 12192000"/>
+              <a:gd name="connsiteY2" fmla="*/ 796944 h 796944"/>
+              <a:gd name="connsiteX3" fmla="*/ 0 w 12192000"/>
+              <a:gd name="connsiteY3" fmla="*/ 796944 h 796944"/>
+              <a:gd name="connsiteX4" fmla="*/ 0 w 12192000"/>
+              <a:gd name="connsiteY4" fmla="*/ 187345 h 796944"/>
+              <a:gd name="connsiteX0" fmla="*/ 0 w 12192000"/>
+              <a:gd name="connsiteY0" fmla="*/ 154569 h 764168"/>
+              <a:gd name="connsiteX1" fmla="*/ 12192000 w 12192000"/>
+              <a:gd name="connsiteY1" fmla="*/ 154569 h 764168"/>
+              <a:gd name="connsiteX2" fmla="*/ 12192000 w 12192000"/>
+              <a:gd name="connsiteY2" fmla="*/ 764168 h 764168"/>
+              <a:gd name="connsiteX3" fmla="*/ 0 w 12192000"/>
+              <a:gd name="connsiteY3" fmla="*/ 764168 h 764168"/>
+              <a:gd name="connsiteX4" fmla="*/ 0 w 12192000"/>
+              <a:gd name="connsiteY4" fmla="*/ 154569 h 764168"/>
+              <a:gd name="connsiteX0" fmla="*/ 0 w 12192000"/>
+              <a:gd name="connsiteY0" fmla="*/ 165354 h 774953"/>
+              <a:gd name="connsiteX1" fmla="*/ 12192000 w 12192000"/>
+              <a:gd name="connsiteY1" fmla="*/ 165354 h 774953"/>
+              <a:gd name="connsiteX2" fmla="*/ 12192000 w 12192000"/>
+              <a:gd name="connsiteY2" fmla="*/ 774953 h 774953"/>
+              <a:gd name="connsiteX3" fmla="*/ 0 w 12192000"/>
+              <a:gd name="connsiteY3" fmla="*/ 774953 h 774953"/>
+              <a:gd name="connsiteX4" fmla="*/ 0 w 12192000"/>
+              <a:gd name="connsiteY4" fmla="*/ 165354 h 774953"/>
+              <a:gd name="connsiteX0" fmla="*/ 0 w 12192000"/>
+              <a:gd name="connsiteY0" fmla="*/ 181798 h 791397"/>
+              <a:gd name="connsiteX1" fmla="*/ 12192000 w 12192000"/>
+              <a:gd name="connsiteY1" fmla="*/ 181798 h 791397"/>
+              <a:gd name="connsiteX2" fmla="*/ 12192000 w 12192000"/>
+              <a:gd name="connsiteY2" fmla="*/ 791397 h 791397"/>
+              <a:gd name="connsiteX3" fmla="*/ 0 w 12192000"/>
+              <a:gd name="connsiteY3" fmla="*/ 791397 h 791397"/>
+              <a:gd name="connsiteX4" fmla="*/ 0 w 12192000"/>
+              <a:gd name="connsiteY4" fmla="*/ 181798 h 791397"/>
+              <a:gd name="connsiteX0" fmla="*/ 0 w 12192000"/>
+              <a:gd name="connsiteY0" fmla="*/ 88858 h 698457"/>
+              <a:gd name="connsiteX1" fmla="*/ 12192000 w 12192000"/>
+              <a:gd name="connsiteY1" fmla="*/ 88858 h 698457"/>
+              <a:gd name="connsiteX2" fmla="*/ 12192000 w 12192000"/>
+              <a:gd name="connsiteY2" fmla="*/ 698457 h 698457"/>
+              <a:gd name="connsiteX3" fmla="*/ 0 w 12192000"/>
+              <a:gd name="connsiteY3" fmla="*/ 698457 h 698457"/>
+              <a:gd name="connsiteX4" fmla="*/ 0 w 12192000"/>
+              <a:gd name="connsiteY4" fmla="*/ 88858 h 698457"/>
+              <a:gd name="connsiteX0" fmla="*/ 10160 w 12192000"/>
+              <a:gd name="connsiteY0" fmla="*/ 93903 h 612062"/>
+              <a:gd name="connsiteX1" fmla="*/ 12192000 w 12192000"/>
+              <a:gd name="connsiteY1" fmla="*/ 2463 h 612062"/>
+              <a:gd name="connsiteX2" fmla="*/ 12192000 w 12192000"/>
+              <a:gd name="connsiteY2" fmla="*/ 612062 h 612062"/>
+              <a:gd name="connsiteX3" fmla="*/ 0 w 12192000"/>
+              <a:gd name="connsiteY3" fmla="*/ 612062 h 612062"/>
+              <a:gd name="connsiteX4" fmla="*/ 10160 w 12192000"/>
+              <a:gd name="connsiteY4" fmla="*/ 93903 h 612062"/>
+              <a:gd name="connsiteX0" fmla="*/ 0 w 12181840"/>
+              <a:gd name="connsiteY0" fmla="*/ 93903 h 612062"/>
+              <a:gd name="connsiteX1" fmla="*/ 12181840 w 12181840"/>
+              <a:gd name="connsiteY1" fmla="*/ 2463 h 612062"/>
+              <a:gd name="connsiteX2" fmla="*/ 12181840 w 12181840"/>
+              <a:gd name="connsiteY2" fmla="*/ 612062 h 612062"/>
+              <a:gd name="connsiteX3" fmla="*/ 12700 w 12181840"/>
+              <a:gd name="connsiteY3" fmla="*/ 612062 h 612062"/>
+              <a:gd name="connsiteX4" fmla="*/ 0 w 12181840"/>
+              <a:gd name="connsiteY4" fmla="*/ 93903 h 612062"/>
+              <a:gd name="connsiteX0" fmla="*/ 0 w 12181840"/>
+              <a:gd name="connsiteY0" fmla="*/ 93459 h 619238"/>
+              <a:gd name="connsiteX1" fmla="*/ 12181840 w 12181840"/>
+              <a:gd name="connsiteY1" fmla="*/ 9639 h 619238"/>
+              <a:gd name="connsiteX2" fmla="*/ 12181840 w 12181840"/>
+              <a:gd name="connsiteY2" fmla="*/ 619238 h 619238"/>
+              <a:gd name="connsiteX3" fmla="*/ 12700 w 12181840"/>
+              <a:gd name="connsiteY3" fmla="*/ 619238 h 619238"/>
+              <a:gd name="connsiteX4" fmla="*/ 0 w 12181840"/>
+              <a:gd name="connsiteY4" fmla="*/ 93459 h 619238"/>
+              <a:gd name="connsiteX0" fmla="*/ 0 w 12181840"/>
+              <a:gd name="connsiteY0" fmla="*/ 93459 h 619238"/>
+              <a:gd name="connsiteX1" fmla="*/ 12181840 w 12181840"/>
+              <a:gd name="connsiteY1" fmla="*/ 9639 h 619238"/>
+              <a:gd name="connsiteX2" fmla="*/ 12181840 w 12181840"/>
+              <a:gd name="connsiteY2" fmla="*/ 619238 h 619238"/>
+              <a:gd name="connsiteX3" fmla="*/ 12700 w 12181840"/>
+              <a:gd name="connsiteY3" fmla="*/ 619238 h 619238"/>
+              <a:gd name="connsiteX4" fmla="*/ 0 w 12181840"/>
+              <a:gd name="connsiteY4" fmla="*/ 93459 h 619238"/>
+              <a:gd name="connsiteX0" fmla="*/ 0 w 12197080"/>
+              <a:gd name="connsiteY0" fmla="*/ 93459 h 619238"/>
+              <a:gd name="connsiteX1" fmla="*/ 12197080 w 12197080"/>
+              <a:gd name="connsiteY1" fmla="*/ 9639 h 619238"/>
+              <a:gd name="connsiteX2" fmla="*/ 12197080 w 12197080"/>
+              <a:gd name="connsiteY2" fmla="*/ 619238 h 619238"/>
+              <a:gd name="connsiteX3" fmla="*/ 27940 w 12197080"/>
+              <a:gd name="connsiteY3" fmla="*/ 619238 h 619238"/>
+              <a:gd name="connsiteX4" fmla="*/ 0 w 12197080"/>
+              <a:gd name="connsiteY4" fmla="*/ 93459 h 619238"/>
+              <a:gd name="connsiteX0" fmla="*/ 2540 w 12199620"/>
+              <a:gd name="connsiteY0" fmla="*/ 93459 h 619238"/>
+              <a:gd name="connsiteX1" fmla="*/ 12199620 w 12199620"/>
+              <a:gd name="connsiteY1" fmla="*/ 9639 h 619238"/>
+              <a:gd name="connsiteX2" fmla="*/ 12199620 w 12199620"/>
+              <a:gd name="connsiteY2" fmla="*/ 619238 h 619238"/>
+              <a:gd name="connsiteX3" fmla="*/ 0 w 12199620"/>
+              <a:gd name="connsiteY3" fmla="*/ 611618 h 619238"/>
+              <a:gd name="connsiteX4" fmla="*/ 2540 w 12199620"/>
+              <a:gd name="connsiteY4" fmla="*/ 93459 h 619238"/>
+              <a:gd name="connsiteX0" fmla="*/ 153 w 12201043"/>
+              <a:gd name="connsiteY0" fmla="*/ 152400 h 609599"/>
+              <a:gd name="connsiteX1" fmla="*/ 12201043 w 12201043"/>
+              <a:gd name="connsiteY1" fmla="*/ 0 h 609599"/>
+              <a:gd name="connsiteX2" fmla="*/ 12201043 w 12201043"/>
+              <a:gd name="connsiteY2" fmla="*/ 609599 h 609599"/>
+              <a:gd name="connsiteX3" fmla="*/ 1423 w 12201043"/>
+              <a:gd name="connsiteY3" fmla="*/ 601979 h 609599"/>
+              <a:gd name="connsiteX4" fmla="*/ 153 w 12201043"/>
+              <a:gd name="connsiteY4" fmla="*/ 152400 h 609599"/>
+              <a:gd name="connsiteX0" fmla="*/ 153 w 12201043"/>
+              <a:gd name="connsiteY0" fmla="*/ 184785 h 609599"/>
+              <a:gd name="connsiteX1" fmla="*/ 12201043 w 12201043"/>
+              <a:gd name="connsiteY1" fmla="*/ 0 h 609599"/>
+              <a:gd name="connsiteX2" fmla="*/ 12201043 w 12201043"/>
+              <a:gd name="connsiteY2" fmla="*/ 609599 h 609599"/>
+              <a:gd name="connsiteX3" fmla="*/ 1423 w 12201043"/>
+              <a:gd name="connsiteY3" fmla="*/ 601979 h 609599"/>
+              <a:gd name="connsiteX4" fmla="*/ 153 w 12201043"/>
+              <a:gd name="connsiteY4" fmla="*/ 184785 h 609599"/>
+            </a:gdLst>
+            <a:ahLst/>
+            <a:cxnLst>
+              <a:cxn ang="0">
+                <a:pos x="connsiteX0" y="connsiteY0"/>
+              </a:cxn>
+              <a:cxn ang="0">
+                <a:pos x="connsiteX1" y="connsiteY1"/>
+              </a:cxn>
+              <a:cxn ang="0">
+                <a:pos x="connsiteX2" y="connsiteY2"/>
+              </a:cxn>
+              <a:cxn ang="0">
+                <a:pos x="connsiteX3" y="connsiteY3"/>
+              </a:cxn>
+              <a:cxn ang="0">
+                <a:pos x="connsiteX4" y="connsiteY4"/>
+              </a:cxn>
+            </a:cxnLst>
+            <a:rect l="l" t="t" r="r" b="b"/>
+            <a:pathLst>
+              <a:path w="12201043" h="609599">
+                <a:moveTo>
+                  <a:pt x="153" y="184785"/>
+                </a:moveTo>
+                <a:cubicBezTo>
+                  <a:pt x="6075833" y="-272415"/>
+                  <a:pt x="8457083" y="1051560"/>
+                  <a:pt x="12201043" y="0"/>
+                </a:cubicBezTo>
+                <a:lnTo>
+                  <a:pt x="12201043" y="609599"/>
+                </a:lnTo>
+                <a:lnTo>
+                  <a:pt x="1423" y="601979"/>
+                </a:lnTo>
+                <a:cubicBezTo>
+                  <a:pt x="2270" y="429259"/>
+                  <a:pt x="-694" y="357505"/>
+                  <a:pt x="153" y="184785"/>
+                </a:cubicBezTo>
+                <a:close/>
+              </a:path>
+            </a:pathLst>
+          </a:custGeom>
+          <a:gradFill flip="none" rotWithShape="1">
+            <a:gsLst>
+              <a:gs pos="60000">
+                <a:srgbClr val="008A41">
+                  <a:alpha val="49804"/>
+                </a:srgbClr>
+              </a:gs>
+              <a:gs pos="0">
+                <a:srgbClr val="008A41">
+                  <a:alpha val="70000"/>
+                </a:srgbClr>
+              </a:gs>
+              <a:gs pos="100000">
+                <a:srgbClr val="A0D2B4"/>
+              </a:gs>
+            </a:gsLst>
+            <a:lin ang="0" scaled="1"/>
+            <a:tileRect/>
+          </a:gradFill>
+          <a:ln>
+            <a:noFill/>
+          </a:ln>
+        </p:spPr>
+        <p:style>
+          <a:lnRef idx="2">
+            <a:schemeClr val="accent1">
+              <a:shade val="50000"/>
+            </a:schemeClr>
+          </a:lnRef>
+          <a:fillRef idx="1">
+            <a:schemeClr val="accent1"/>
+          </a:fillRef>
+          <a:effectRef idx="0">
+            <a:schemeClr val="accent1"/>
+          </a:effectRef>
+          <a:fontRef idx="minor">
+            <a:schemeClr val="lt1"/>
+          </a:fontRef>
+        </p:style>
+        <p:txBody>
+          <a:bodyPr rtlCol="0" anchor="ctr"/>
+          <a:lstStyle/>
+          <a:p>
+            <a:pPr algn="ctr"/>
+            <a:endParaRPr lang="zh-CN" altLang="en-US"/>
+          </a:p>
+        </p:txBody>
+      </p:sp>
+      <p:sp>
+        <p:nvSpPr>
+          <p:cNvPr id="5" name="任意多边形: 形状 4">
+            <a:extLst>
+              <a:ext uri="{FF2B5EF4-FFF2-40B4-BE49-F238E27FC236}">
+                <a16:creationId xmlns:a16="http://schemas.microsoft.com/office/drawing/2014/main" id="{DF48A457-6CF7-EB25-63B4-F95267534A78}"/>
+              </a:ext>
+            </a:extLst>
+          </p:cNvPr>
+          <p:cNvSpPr/>
+          <p:nvPr userDrawn="1"/>
+        </p:nvSpPr>
+        <p:spPr>
+          <a:xfrm flipH="1" flipV="1">
+            <a:off x="-6103" y="-10167"/>
+            <a:ext cx="9143999" cy="388031"/>
+          </a:xfrm>
+          <a:custGeom>
+            <a:avLst/>
+            <a:gdLst>
+              <a:gd name="connsiteX0" fmla="*/ 12192000 w 12192000"/>
+              <a:gd name="connsiteY0" fmla="*/ 0 h 2039768"/>
+              <a:gd name="connsiteX1" fmla="*/ 12192000 w 12192000"/>
+              <a:gd name="connsiteY1" fmla="*/ 2039768 h 2039768"/>
+              <a:gd name="connsiteX2" fmla="*/ 0 w 12192000"/>
+              <a:gd name="connsiteY2" fmla="*/ 2039768 h 2039768"/>
+              <a:gd name="connsiteX3" fmla="*/ 0 w 12192000"/>
+              <a:gd name="connsiteY3" fmla="*/ 819391 h 2039768"/>
+              <a:gd name="connsiteX4" fmla="*/ 37309 w 12192000"/>
+              <a:gd name="connsiteY4" fmla="*/ 834936 h 2039768"/>
+              <a:gd name="connsiteX5" fmla="*/ 5319640 w 12192000"/>
+              <a:gd name="connsiteY5" fmla="*/ 1747868 h 2039768"/>
+              <a:gd name="connsiteX6" fmla="*/ 11971651 w 12192000"/>
+              <a:gd name="connsiteY6" fmla="*/ 149892 h 2039768"/>
+              <a:gd name="connsiteX0" fmla="*/ 12192000 w 12192000"/>
+              <a:gd name="connsiteY0" fmla="*/ 373966 h 1893600"/>
+              <a:gd name="connsiteX1" fmla="*/ 12192000 w 12192000"/>
+              <a:gd name="connsiteY1" fmla="*/ 1893600 h 1893600"/>
+              <a:gd name="connsiteX2" fmla="*/ 0 w 12192000"/>
+              <a:gd name="connsiteY2" fmla="*/ 1893600 h 1893600"/>
+              <a:gd name="connsiteX3" fmla="*/ 0 w 12192000"/>
+              <a:gd name="connsiteY3" fmla="*/ 673223 h 1893600"/>
+              <a:gd name="connsiteX4" fmla="*/ 37309 w 12192000"/>
+              <a:gd name="connsiteY4" fmla="*/ 688768 h 1893600"/>
+              <a:gd name="connsiteX5" fmla="*/ 5319640 w 12192000"/>
+              <a:gd name="connsiteY5" fmla="*/ 1601700 h 1893600"/>
+              <a:gd name="connsiteX6" fmla="*/ 11971651 w 12192000"/>
+              <a:gd name="connsiteY6" fmla="*/ 3724 h 1893600"/>
+              <a:gd name="connsiteX7" fmla="*/ 12192000 w 12192000"/>
+              <a:gd name="connsiteY7" fmla="*/ 373966 h 1893600"/>
+              <a:gd name="connsiteX0" fmla="*/ 12192000 w 12192000"/>
+              <a:gd name="connsiteY0" fmla="*/ 1413 h 1521047"/>
+              <a:gd name="connsiteX1" fmla="*/ 12192000 w 12192000"/>
+              <a:gd name="connsiteY1" fmla="*/ 1521047 h 1521047"/>
+              <a:gd name="connsiteX2" fmla="*/ 0 w 12192000"/>
+              <a:gd name="connsiteY2" fmla="*/ 1521047 h 1521047"/>
+              <a:gd name="connsiteX3" fmla="*/ 0 w 12192000"/>
+              <a:gd name="connsiteY3" fmla="*/ 300670 h 1521047"/>
+              <a:gd name="connsiteX4" fmla="*/ 37309 w 12192000"/>
+              <a:gd name="connsiteY4" fmla="*/ 316215 h 1521047"/>
+              <a:gd name="connsiteX5" fmla="*/ 5319640 w 12192000"/>
+              <a:gd name="connsiteY5" fmla="*/ 1229147 h 1521047"/>
+              <a:gd name="connsiteX6" fmla="*/ 12192000 w 12192000"/>
+              <a:gd name="connsiteY6" fmla="*/ 1413 h 1521047"/>
+              <a:gd name="connsiteX0" fmla="*/ 12192000 w 12192000"/>
+              <a:gd name="connsiteY0" fmla="*/ 0 h 1519634"/>
+              <a:gd name="connsiteX1" fmla="*/ 12192000 w 12192000"/>
+              <a:gd name="connsiteY1" fmla="*/ 1519634 h 1519634"/>
+              <a:gd name="connsiteX2" fmla="*/ 0 w 12192000"/>
+              <a:gd name="connsiteY2" fmla="*/ 1519634 h 1519634"/>
+              <a:gd name="connsiteX3" fmla="*/ 0 w 12192000"/>
+              <a:gd name="connsiteY3" fmla="*/ 299257 h 1519634"/>
+              <a:gd name="connsiteX4" fmla="*/ 37309 w 12192000"/>
+              <a:gd name="connsiteY4" fmla="*/ 314802 h 1519634"/>
+              <a:gd name="connsiteX5" fmla="*/ 5319640 w 12192000"/>
+              <a:gd name="connsiteY5" fmla="*/ 1227734 h 1519634"/>
+              <a:gd name="connsiteX6" fmla="*/ 12192000 w 12192000"/>
+              <a:gd name="connsiteY6" fmla="*/ 0 h 1519634"/>
+              <a:gd name="connsiteX0" fmla="*/ 12192000 w 12192000"/>
+              <a:gd name="connsiteY0" fmla="*/ 0 h 1519634"/>
+              <a:gd name="connsiteX1" fmla="*/ 12192000 w 12192000"/>
+              <a:gd name="connsiteY1" fmla="*/ 1519634 h 1519634"/>
+              <a:gd name="connsiteX2" fmla="*/ 0 w 12192000"/>
+              <a:gd name="connsiteY2" fmla="*/ 1519634 h 1519634"/>
+              <a:gd name="connsiteX3" fmla="*/ 0 w 12192000"/>
+              <a:gd name="connsiteY3" fmla="*/ 299257 h 1519634"/>
+              <a:gd name="connsiteX4" fmla="*/ 140179 w 12192000"/>
+              <a:gd name="connsiteY4" fmla="*/ 401490 h 1519634"/>
+              <a:gd name="connsiteX5" fmla="*/ 5319640 w 12192000"/>
+              <a:gd name="connsiteY5" fmla="*/ 1227734 h 1519634"/>
+              <a:gd name="connsiteX6" fmla="*/ 12192000 w 12192000"/>
+              <a:gd name="connsiteY6" fmla="*/ 0 h 1519634"/>
+              <a:gd name="connsiteX0" fmla="*/ 12192000 w 12192000"/>
+              <a:gd name="connsiteY0" fmla="*/ 0 h 1519634"/>
+              <a:gd name="connsiteX1" fmla="*/ 12192000 w 12192000"/>
+              <a:gd name="connsiteY1" fmla="*/ 1519634 h 1519634"/>
+              <a:gd name="connsiteX2" fmla="*/ 0 w 12192000"/>
+              <a:gd name="connsiteY2" fmla="*/ 1519634 h 1519634"/>
+              <a:gd name="connsiteX3" fmla="*/ 0 w 12192000"/>
+              <a:gd name="connsiteY3" fmla="*/ 299257 h 1519634"/>
+              <a:gd name="connsiteX4" fmla="*/ 5319640 w 12192000"/>
+              <a:gd name="connsiteY4" fmla="*/ 1227734 h 1519634"/>
+              <a:gd name="connsiteX5" fmla="*/ 12192000 w 12192000"/>
+              <a:gd name="connsiteY5" fmla="*/ 0 h 1519634"/>
+              <a:gd name="connsiteX0" fmla="*/ 12192000 w 12192000"/>
+              <a:gd name="connsiteY0" fmla="*/ 0 h 1519634"/>
+              <a:gd name="connsiteX1" fmla="*/ 12192000 w 12192000"/>
+              <a:gd name="connsiteY1" fmla="*/ 1519634 h 1519634"/>
+              <a:gd name="connsiteX2" fmla="*/ 0 w 12192000"/>
+              <a:gd name="connsiteY2" fmla="*/ 1519634 h 1519634"/>
+              <a:gd name="connsiteX3" fmla="*/ 3810 w 12192000"/>
+              <a:gd name="connsiteY3" fmla="*/ 628674 h 1519634"/>
+              <a:gd name="connsiteX4" fmla="*/ 5319640 w 12192000"/>
+              <a:gd name="connsiteY4" fmla="*/ 1227734 h 1519634"/>
+              <a:gd name="connsiteX5" fmla="*/ 12192000 w 12192000"/>
+              <a:gd name="connsiteY5" fmla="*/ 0 h 1519634"/>
+              <a:gd name="connsiteX0" fmla="*/ 12192000 w 12192000"/>
+              <a:gd name="connsiteY0" fmla="*/ 0 h 1519634"/>
+              <a:gd name="connsiteX1" fmla="*/ 12192000 w 12192000"/>
+              <a:gd name="connsiteY1" fmla="*/ 1519634 h 1519634"/>
+              <a:gd name="connsiteX2" fmla="*/ 0 w 12192000"/>
+              <a:gd name="connsiteY2" fmla="*/ 1519634 h 1519634"/>
+              <a:gd name="connsiteX3" fmla="*/ 3810 w 12192000"/>
+              <a:gd name="connsiteY3" fmla="*/ 628674 h 1519634"/>
+              <a:gd name="connsiteX4" fmla="*/ 5319640 w 12192000"/>
+              <a:gd name="connsiteY4" fmla="*/ 1227734 h 1519634"/>
+              <a:gd name="connsiteX5" fmla="*/ 12192000 w 12192000"/>
+              <a:gd name="connsiteY5" fmla="*/ 0 h 1519634"/>
+              <a:gd name="connsiteX0" fmla="*/ 12192000 w 12192000"/>
+              <a:gd name="connsiteY0" fmla="*/ 0 h 1519634"/>
+              <a:gd name="connsiteX1" fmla="*/ 12192000 w 12192000"/>
+              <a:gd name="connsiteY1" fmla="*/ 1519634 h 1519634"/>
+              <a:gd name="connsiteX2" fmla="*/ 0 w 12192000"/>
+              <a:gd name="connsiteY2" fmla="*/ 1519634 h 1519634"/>
+              <a:gd name="connsiteX3" fmla="*/ 3810 w 12192000"/>
+              <a:gd name="connsiteY3" fmla="*/ 628674 h 1519634"/>
+              <a:gd name="connsiteX4" fmla="*/ 5319640 w 12192000"/>
+              <a:gd name="connsiteY4" fmla="*/ 1227734 h 1519634"/>
+              <a:gd name="connsiteX5" fmla="*/ 12192000 w 12192000"/>
+              <a:gd name="connsiteY5" fmla="*/ 0 h 1519634"/>
+              <a:gd name="connsiteX0" fmla="*/ 12192000 w 12192000"/>
+              <a:gd name="connsiteY0" fmla="*/ 0 h 1519634"/>
+              <a:gd name="connsiteX1" fmla="*/ 12192000 w 12192000"/>
+              <a:gd name="connsiteY1" fmla="*/ 1519634 h 1519634"/>
+              <a:gd name="connsiteX2" fmla="*/ 0 w 12192000"/>
+              <a:gd name="connsiteY2" fmla="*/ 1519634 h 1519634"/>
+              <a:gd name="connsiteX3" fmla="*/ 3810 w 12192000"/>
+              <a:gd name="connsiteY3" fmla="*/ 628674 h 1519634"/>
+              <a:gd name="connsiteX4" fmla="*/ 5319640 w 12192000"/>
+              <a:gd name="connsiteY4" fmla="*/ 1227734 h 1519634"/>
+              <a:gd name="connsiteX5" fmla="*/ 12192000 w 12192000"/>
+              <a:gd name="connsiteY5" fmla="*/ 0 h 1519634"/>
+              <a:gd name="connsiteX0" fmla="*/ 12198096 w 12198096"/>
+              <a:gd name="connsiteY0" fmla="*/ 0 h 1325451"/>
+              <a:gd name="connsiteX1" fmla="*/ 12192000 w 12198096"/>
+              <a:gd name="connsiteY1" fmla="*/ 1325451 h 1325451"/>
+              <a:gd name="connsiteX2" fmla="*/ 0 w 12198096"/>
+              <a:gd name="connsiteY2" fmla="*/ 1325451 h 1325451"/>
+              <a:gd name="connsiteX3" fmla="*/ 3810 w 12198096"/>
+              <a:gd name="connsiteY3" fmla="*/ 434491 h 1325451"/>
+              <a:gd name="connsiteX4" fmla="*/ 5319640 w 12198096"/>
+              <a:gd name="connsiteY4" fmla="*/ 1033551 h 1325451"/>
+              <a:gd name="connsiteX5" fmla="*/ 12198096 w 12198096"/>
+              <a:gd name="connsiteY5" fmla="*/ 0 h 1325451"/>
+              <a:gd name="connsiteX0" fmla="*/ 12198096 w 12198096"/>
+              <a:gd name="connsiteY0" fmla="*/ 0 h 1325451"/>
+              <a:gd name="connsiteX1" fmla="*/ 12192000 w 12198096"/>
+              <a:gd name="connsiteY1" fmla="*/ 1325451 h 1325451"/>
+              <a:gd name="connsiteX2" fmla="*/ 0 w 12198096"/>
+              <a:gd name="connsiteY2" fmla="*/ 1325451 h 1325451"/>
+              <a:gd name="connsiteX3" fmla="*/ 3810 w 12198096"/>
+              <a:gd name="connsiteY3" fmla="*/ 434491 h 1325451"/>
+              <a:gd name="connsiteX4" fmla="*/ 5325736 w 12198096"/>
+              <a:gd name="connsiteY4" fmla="*/ 978070 h 1325451"/>
+              <a:gd name="connsiteX5" fmla="*/ 12198096 w 12198096"/>
+              <a:gd name="connsiteY5" fmla="*/ 0 h 1325451"/>
+            </a:gdLst>
+            <a:ahLst/>
+            <a:cxnLst>
+              <a:cxn ang="0">
+                <a:pos x="connsiteX0" y="connsiteY0"/>
+              </a:cxn>
+              <a:cxn ang="0">
+                <a:pos x="connsiteX1" y="connsiteY1"/>
+              </a:cxn>
+              <a:cxn ang="0">
+                <a:pos x="connsiteX2" y="connsiteY2"/>
+              </a:cxn>
+              <a:cxn ang="0">
+                <a:pos x="connsiteX3" y="connsiteY3"/>
+              </a:cxn>
+              <a:cxn ang="0">
+                <a:pos x="connsiteX4" y="connsiteY4"/>
+              </a:cxn>
+              <a:cxn ang="0">
+                <a:pos x="connsiteX5" y="connsiteY5"/>
+              </a:cxn>
+            </a:cxnLst>
+            <a:rect l="l" t="t" r="r" b="b"/>
+            <a:pathLst>
+              <a:path w="12198096" h="1325451">
+                <a:moveTo>
+                  <a:pt x="12198096" y="0"/>
+                </a:moveTo>
+                <a:lnTo>
+                  <a:pt x="12192000" y="1325451"/>
+                </a:lnTo>
+                <a:lnTo>
+                  <a:pt x="0" y="1325451"/>
+                </a:lnTo>
+                <a:lnTo>
+                  <a:pt x="3810" y="434491"/>
+                </a:lnTo>
+                <a:cubicBezTo>
+                  <a:pt x="1718603" y="876908"/>
+                  <a:pt x="3533473" y="963319"/>
+                  <a:pt x="5325736" y="978070"/>
+                </a:cubicBezTo>
+                <a:cubicBezTo>
+                  <a:pt x="7351518" y="925603"/>
+                  <a:pt x="10633603" y="731550"/>
+                  <a:pt x="12198096" y="0"/>
+                </a:cubicBezTo>
+                <a:close/>
+              </a:path>
+            </a:pathLst>
+          </a:custGeom>
+          <a:gradFill flip="none" rotWithShape="1">
+            <a:gsLst>
+              <a:gs pos="60000">
+                <a:srgbClr val="A0D2B4">
+                  <a:alpha val="50000"/>
+                </a:srgbClr>
+              </a:gs>
+              <a:gs pos="0">
+                <a:srgbClr val="008A41">
+                  <a:alpha val="70000"/>
+                </a:srgbClr>
+              </a:gs>
+              <a:gs pos="100000">
+                <a:srgbClr val="A0D2B4">
+                  <a:alpha val="50000"/>
+                </a:srgbClr>
+              </a:gs>
+            </a:gsLst>
+            <a:lin ang="10800000" scaled="0"/>
+            <a:tileRect/>
+          </a:gradFill>
+          <a:ln>
+            <a:noFill/>
+          </a:ln>
+        </p:spPr>
+        <p:style>
+          <a:lnRef idx="2">
+            <a:schemeClr val="accent1">
+              <a:shade val="50000"/>
+            </a:schemeClr>
+          </a:lnRef>
+          <a:fillRef idx="1">
+            <a:schemeClr val="accent1"/>
+          </a:fillRef>
+          <a:effectRef idx="0">
+            <a:schemeClr val="accent1"/>
+          </a:effectRef>
+          <a:fontRef idx="minor">
+            <a:schemeClr val="lt1"/>
+          </a:fontRef>
+        </p:style>
+        <p:txBody>
+          <a:bodyPr rtlCol="0" anchor="ctr"/>
+          <a:lstStyle/>
+          <a:p>
+            <a:pPr lvl="0" algn="ctr"/>
+            <a:endParaRPr lang="zh-CN" altLang="en-US"/>
+          </a:p>
+        </p:txBody>
+      </p:sp>
+      <p:pic>
+        <p:nvPicPr>
+          <p:cNvPr id="6" name="图片 5">
+            <a:extLst>
+              <a:ext uri="{FF2B5EF4-FFF2-40B4-BE49-F238E27FC236}">
+                <a16:creationId xmlns:a16="http://schemas.microsoft.com/office/drawing/2014/main" id="{654D3C78-D757-585D-F994-18E3479A24A2}"/>
+              </a:ext>
+            </a:extLst>
+          </p:cNvPr>
+          <p:cNvPicPr>
+            <a:picLocks noChangeAspect="1"/>
+          </p:cNvPicPr>
+          <p:nvPr userDrawn="1"/>
+        </p:nvPicPr>
+        <p:blipFill>
+          <a:blip r:embed="rId2" cstate="print">
+            <a:extLst>
+              <a:ext uri="{BEBA8EAE-BF5A-486C-A8C5-ECC9F3942E4B}">
+                <a14:imgProps xmlns:a14="http://schemas.microsoft.com/office/drawing/2010/main">
+                  <a14:imgLayer r:embed="rId3">
+                    <a14:imgEffect>
+                      <a14:backgroundRemoval t="3090" b="89888" l="2563" r="97313">
+                        <a14:foregroundMark x1="7187" y1="50562" x2="61563" y2="38764"/>
+                        <a14:foregroundMark x1="61563" y1="38764" x2="63438" y2="41292"/>
+                        <a14:foregroundMark x1="29875" y1="86798" x2="41313" y2="84551"/>
+                        <a14:foregroundMark x1="41313" y1="84551" x2="57375" y2="89607"/>
+                        <a14:foregroundMark x1="57375" y1="89607" x2="63438" y2="85112"/>
+                        <a14:foregroundMark x1="63438" y1="85112" x2="64063" y2="85112"/>
+                        <a14:foregroundMark x1="22250" y1="25843" x2="23375" y2="34831"/>
+                        <a14:foregroundMark x1="22375" y1="26124" x2="26438" y2="23876"/>
+                        <a14:foregroundMark x1="26438" y1="23876" x2="28688" y2="24438"/>
+                        <a14:foregroundMark x1="22313" y1="23315" x2="28750" y2="25562"/>
+                        <a14:foregroundMark x1="68313" y1="24157" x2="68313" y2="24157"/>
+                        <a14:foregroundMark x1="68375" y1="70506" x2="68375" y2="70506"/>
+                        <a14:foregroundMark x1="68063" y1="61236" x2="68063" y2="61236"/>
+                        <a14:foregroundMark x1="83438" y1="31180" x2="87688" y2="19382"/>
+                        <a14:foregroundMark x1="87688" y1="19382" x2="91813" y2="23315"/>
+                        <a14:foregroundMark x1="91813" y1="23315" x2="95063" y2="37079"/>
+                        <a14:foregroundMark x1="95063" y1="37079" x2="95188" y2="56461"/>
+                        <a14:foregroundMark x1="95188" y1="56461" x2="91188" y2="72753"/>
+                        <a14:foregroundMark x1="91188" y1="72753" x2="86438" y2="75562"/>
+                        <a14:foregroundMark x1="86438" y1="75562" x2="82438" y2="60393"/>
+                        <a14:foregroundMark x1="82438" y1="60393" x2="82125" y2="40449"/>
+                        <a14:foregroundMark x1="82125" y1="40449" x2="83813" y2="29213"/>
+                        <a14:foregroundMark x1="85688" y1="46910" x2="91313" y2="42416"/>
+                        <a14:foregroundMark x1="84500" y1="41854" x2="89125" y2="45506"/>
+                        <a14:foregroundMark x1="89125" y1="45506" x2="89313" y2="66573"/>
+                        <a14:foregroundMark x1="89313" y1="66573" x2="85375" y2="56742"/>
+                        <a14:foregroundMark x1="85375" y1="56742" x2="86188" y2="33427"/>
+                        <a14:foregroundMark x1="86188" y1="33427" x2="89625" y2="23315"/>
+                        <a14:foregroundMark x1="89625" y1="23315" x2="93063" y2="58146"/>
+                        <a14:foregroundMark x1="93063" y1="58146" x2="92625" y2="60955"/>
+                        <a14:foregroundMark x1="83250" y1="28933" x2="87125" y2="18539"/>
+                        <a14:foregroundMark x1="87125" y1="18539" x2="92063" y2="21629"/>
+                        <a14:foregroundMark x1="92063" y1="21629" x2="95063" y2="33989"/>
+                        <a14:foregroundMark x1="95063" y1="33989" x2="95875" y2="52247"/>
+                        <a14:foregroundMark x1="95875" y1="52247" x2="92688" y2="71910"/>
+                        <a14:foregroundMark x1="92688" y1="71910" x2="89188" y2="80337"/>
+                        <a14:foregroundMark x1="89188" y1="80337" x2="84125" y2="70787"/>
+                        <a14:foregroundMark x1="84125" y1="70787" x2="81313" y2="53371"/>
+                        <a14:foregroundMark x1="81313" y1="53371" x2="81875" y2="39607"/>
+                        <a14:foregroundMark x1="60250" y1="39888" x2="58125" y2="37079"/>
+                        <a14:foregroundMark x1="67625" y1="32022" x2="69313" y2="53090"/>
+                        <a14:foregroundMark x1="69313" y1="53090" x2="75000" y2="35674"/>
+                        <a14:foregroundMark x1="75000" y1="35674" x2="68813" y2="40449"/>
+                        <a14:foregroundMark x1="68813" y1="40449" x2="69000" y2="21629"/>
+                        <a14:foregroundMark x1="69000" y1="21629" x2="74250" y2="16292"/>
+                        <a14:foregroundMark x1="74250" y1="16292" x2="78563" y2="24719"/>
+                        <a14:foregroundMark x1="78563" y1="24719" x2="80063" y2="46348"/>
+                        <a14:foregroundMark x1="80063" y1="46348" x2="75813" y2="71067"/>
+                        <a14:foregroundMark x1="75813" y1="71067" x2="70438" y2="74719"/>
+                        <a14:foregroundMark x1="70438" y1="74719" x2="77063" y2="69944"/>
+                        <a14:foregroundMark x1="77063" y1="69944" x2="72313" y2="77528"/>
+                        <a14:foregroundMark x1="72313" y1="77528" x2="67500" y2="53090"/>
+                        <a14:foregroundMark x1="67500" y1="53090" x2="68063" y2="72753"/>
+                        <a14:foregroundMark x1="68063" y1="72753" x2="69000" y2="77528"/>
+                        <a14:foregroundMark x1="70688" y1="76685" x2="72438" y2="80056"/>
+                        <a14:foregroundMark x1="73750" y1="78371" x2="75688" y2="78652"/>
+                        <a14:foregroundMark x1="70813" y1="78090" x2="72063" y2="73876"/>
+                        <a14:foregroundMark x1="5407" y1="21913" x2="10063" y2="20506"/>
+                        <a14:foregroundMark x1="10063" y1="20506" x2="33938" y2="20506"/>
+                        <a14:foregroundMark x1="33938" y1="20506" x2="53813" y2="11798"/>
+                        <a14:foregroundMark x1="53813" y1="11798" x2="64813" y2="15449"/>
+                        <a14:foregroundMark x1="64813" y1="15449" x2="67750" y2="43539"/>
+                        <a14:foregroundMark x1="67750" y1="43539" x2="67750" y2="73876"/>
+                        <a14:foregroundMark x1="67750" y1="73876" x2="59750" y2="97753"/>
+                        <a14:foregroundMark x1="59750" y1="97753" x2="40250" y2="95506"/>
+                        <a14:foregroundMark x1="40250" y1="95506" x2="9375" y2="72753"/>
+                        <a14:foregroundMark x1="9375" y1="72753" x2="5309" y2="63916"/>
+                        <a14:foregroundMark x1="10125" y1="10955" x2="11750" y2="27528"/>
+                        <a14:foregroundMark x1="11750" y1="27528" x2="9125" y2="14045"/>
+                        <a14:foregroundMark x1="9125" y1="14045" x2="13188" y2="16011"/>
+                        <a14:foregroundMark x1="86698" y1="5849" x2="92049" y2="12903"/>
+                        <a14:foregroundMark x1="97370" y1="25565" x2="99688" y2="49719"/>
+                        <a14:foregroundMark x1="99688" y1="49719" x2="98188" y2="69101"/>
+                        <a14:foregroundMark x1="98188" y1="69101" x2="93563" y2="85112"/>
+                        <a14:foregroundMark x1="93563" y1="85112" x2="55688" y2="99719"/>
+                        <a14:foregroundMark x1="55688" y1="99719" x2="7164" y2="90806"/>
+                        <a14:foregroundMark x1="5404" y1="20395" x2="5750" y2="17978"/>
+                        <a14:foregroundMark x1="5750" y1="17978" x2="44938" y2="2528"/>
+                        <a14:foregroundMark x1="44938" y1="2528" x2="90875" y2="24438"/>
+                        <a14:foregroundMark x1="90875" y1="24438" x2="80938" y2="14607"/>
+                        <a14:foregroundMark x1="80938" y1="14607" x2="81099" y2="13463"/>
+                        <a14:foregroundMark x1="68750" y1="12360" x2="78063" y2="17135"/>
+                        <a14:foregroundMark x1="78063" y1="17135" x2="87938" y2="14607"/>
+                        <a14:foregroundMark x1="87938" y1="14607" x2="93500" y2="20506"/>
+                        <a14:foregroundMark x1="93500" y1="20506" x2="97500" y2="30618"/>
+                        <a14:foregroundMark x1="97500" y1="30618" x2="97313" y2="59831"/>
+                        <a14:foregroundMark x1="97313" y1="59831" x2="89563" y2="72753"/>
+                        <a14:foregroundMark x1="89563" y1="72753" x2="79813" y2="68258"/>
+                        <a14:foregroundMark x1="79813" y1="68258" x2="69438" y2="31180"/>
+                        <a14:foregroundMark x1="69438" y1="31180" x2="68688" y2="12921"/>
+                        <a14:foregroundMark x1="68688" y1="12921" x2="68688" y2="12640"/>
+                        <a14:foregroundMark x1="5938" y1="33708" x2="6750" y2="79213"/>
+                        <a14:backgroundMark x1="95264" y1="19646" x2="99063" y2="22472"/>
+                        <a14:backgroundMark x1="72250" y1="2528" x2="84419" y2="11579"/>
+                        <a14:backgroundMark x1="99063" y1="22472" x2="99563" y2="1685"/>
+                        <a14:backgroundMark x1="99563" y1="1685" x2="71625" y2="1966"/>
+                        <a14:backgroundMark x1="563" y1="11236" x2="6375" y2="95506"/>
+                        <a14:backgroundMark x1="3125" y1="64607" x2="4500" y2="85112"/>
+                        <a14:backgroundMark x1="2313" y1="66573" x2="3375" y2="64607"/>
+                        <a14:backgroundMark x1="313" y1="17416" x2="625" y2="98315"/>
+                        <a14:backgroundMark x1="1188" y1="19382" x2="4313" y2="98596"/>
+                        <a14:backgroundMark x1="2750" y1="26685" x2="3125" y2="37079"/>
+                        <a14:backgroundMark x1="1750" y1="19382" x2="4500" y2="38483"/>
+                        <a14:backgroundMark x1="1750" y1="15449" x2="1750" y2="15449"/>
+                        <a14:backgroundMark x1="1750" y1="17135" x2="4313" y2="37640"/>
+                        <a14:backgroundMark x1="1875" y1="21910" x2="3938" y2="26966"/>
+                        <a14:backgroundMark x1="4313" y1="3371" x2="4375" y2="39888"/>
+                      </a14:backgroundRemoval>
+                    </a14:imgEffect>
+                  </a14:imgLayer>
+                </a14:imgProps>
+              </a:ext>
+              <a:ext uri="{28A0092B-C50C-407E-A947-70E740481C1C}">
+                <a14:useLocalDpi xmlns:a14="http://schemas.microsoft.com/office/drawing/2010/main" val="0"/>
+              </a:ext>
+            </a:extLst>
+          </a:blip>
+          <a:stretch>
+            <a:fillRect/>
+          </a:stretch>
+        </p:blipFill>
+        <p:spPr>
           <a:xfrm>
-            <a:off x="8472458" y="4663217"/>
-            <a:ext cx="548700" cy="393600"/>
+            <a:off x="5914739" y="183848"/>
+            <a:ext cx="3223157" cy="717152"/>
           </a:xfrm>
           <a:prstGeom prst="rect">
             <a:avLst/>
           </a:prstGeom>
         </p:spPr>
-        <p:txBody>
-          <a:bodyPr spcFirstLastPara="1" wrap="square" lIns="91425" tIns="91425" rIns="91425" bIns="91425" anchor="ctr" anchorCtr="0">
-            <a:normAutofit/>
-          </a:bodyPr>
-          <a:lstStyle>
-            <a:lvl1pPr lvl="0">
-              <a:buNone/>
-              <a:defRPr/>
-            </a:lvl1pPr>
-            <a:lvl2pPr lvl="1">
-              <a:buNone/>
-              <a:defRPr/>
-            </a:lvl2pPr>
-            <a:lvl3pPr lvl="2">
-              <a:buNone/>
-              <a:defRPr/>
-            </a:lvl3pPr>
-            <a:lvl4pPr lvl="3">
-              <a:buNone/>
-              <a:defRPr/>
-            </a:lvl4pPr>
-            <a:lvl5pPr lvl="4">
-              <a:buNone/>
-              <a:defRPr/>
-            </a:lvl5pPr>
-            <a:lvl6pPr lvl="5">
-              <a:buNone/>
-              <a:defRPr/>
-            </a:lvl6pPr>
-            <a:lvl7pPr lvl="6">
-              <a:buNone/>
-              <a:defRPr/>
-            </a:lvl7pPr>
-            <a:lvl8pPr lvl="7">
-              <a:buNone/>
-              <a:defRPr/>
-            </a:lvl8pPr>
-            <a:lvl9pPr lvl="8">
-              <a:buNone/>
-              <a:defRPr/>
-            </a:lvl9pPr>
-          </a:lstStyle>
-          <a:p>
-            <a:pPr marL="0" lvl="0" indent="0" algn="r" rtl="0">
-              <a:spcBef>
-                <a:spcPts val="0"/>
-              </a:spcBef>
-              <a:spcAft>
-                <a:spcPts val="0"/>
-              </a:spcAft>
-              <a:buNone/>
-            </a:pPr>
-            <a:fld id="{00000000-1234-1234-1234-123412341234}" type="slidenum">
-              <a:rPr lang="en-GB"/>
-              <a:t>‹#›</a:t>
-            </a:fld>
-            <a:endParaRPr lang="en-GB"/>
-          </a:p>
-        </p:txBody>
-      </p:sp>
+      </p:pic>
     </p:spTree>
   </p:cSld>
   <p:clrMapOvr>
@@ -3109,7 +4193,7 @@
 </p:sldLayout>
 </file>
 
-<file path=ppt/slideLayouts/slideLayout4.xml><?xml version="1.0" encoding="utf-8"?>
+<file path=ppt/slideLayouts/slideLayout3.xml><?xml version="1.0" encoding="utf-8"?>
 <p:sldLayout xmlns:a="http://schemas.openxmlformats.org/drawingml/2006/main" xmlns:r="http://schemas.openxmlformats.org/officeDocument/2006/relationships" xmlns:p="http://schemas.openxmlformats.org/presentationml/2006/main" matchingName="Title and two columns" type="twoColTx">
   <p:cSld name="TITLE_AND_TWO_COLUMNS">
     <p:spTree>
@@ -3600,7 +4684,7 @@
 </p:sldLayout>
 </file>
 
-<file path=ppt/slideLayouts/slideLayout5.xml><?xml version="1.0" encoding="utf-8"?>
+<file path=ppt/slideLayouts/slideLayout4.xml><?xml version="1.0" encoding="utf-8"?>
 <p:sldLayout xmlns:a="http://schemas.openxmlformats.org/drawingml/2006/main" xmlns:r="http://schemas.openxmlformats.org/officeDocument/2006/relationships" xmlns:p="http://schemas.openxmlformats.org/presentationml/2006/main" matchingName="Title only" type="titleOnly">
   <p:cSld name="TITLE_ONLY">
     <p:spTree>
@@ -3833,7 +4917,7 @@
 </p:sldLayout>
 </file>
 
-<file path=ppt/slideLayouts/slideLayout6.xml><?xml version="1.0" encoding="utf-8"?>
+<file path=ppt/slideLayouts/slideLayout5.xml><?xml version="1.0" encoding="utf-8"?>
 <p:sldLayout xmlns:a="http://schemas.openxmlformats.org/drawingml/2006/main" xmlns:r="http://schemas.openxmlformats.org/officeDocument/2006/relationships" xmlns:p="http://schemas.openxmlformats.org/presentationml/2006/main" matchingName="One column text">
   <p:cSld name="ONE_COLUMN_TEXT">
     <p:spTree>
@@ -4195,7 +5279,7 @@
 </p:sldLayout>
 </file>
 
-<file path=ppt/slideLayouts/slideLayout7.xml><?xml version="1.0" encoding="utf-8"?>
+<file path=ppt/slideLayouts/slideLayout6.xml><?xml version="1.0" encoding="utf-8"?>
 <p:sldLayout xmlns:a="http://schemas.openxmlformats.org/drawingml/2006/main" xmlns:r="http://schemas.openxmlformats.org/officeDocument/2006/relationships" xmlns:p="http://schemas.openxmlformats.org/presentationml/2006/main" matchingName="Main point">
   <p:cSld name="MAIN_POINT">
     <p:spTree>
@@ -4428,7 +5512,7 @@
 </p:sldLayout>
 </file>
 
-<file path=ppt/slideLayouts/slideLayout8.xml><?xml version="1.0" encoding="utf-8"?>
+<file path=ppt/slideLayouts/slideLayout7.xml><?xml version="1.0" encoding="utf-8"?>
 <p:sldLayout xmlns:a="http://schemas.openxmlformats.org/drawingml/2006/main" xmlns:r="http://schemas.openxmlformats.org/officeDocument/2006/relationships" xmlns:p="http://schemas.openxmlformats.org/presentationml/2006/main" matchingName="Section title and description">
   <p:cSld name="SECTION_TITLE_AND_DESCRIPTION">
     <p:spTree>
@@ -4986,7 +6070,7 @@
 </p:sldLayout>
 </file>
 
-<file path=ppt/slideLayouts/slideLayout9.xml><?xml version="1.0" encoding="utf-8"?>
+<file path=ppt/slideLayouts/slideLayout8.xml><?xml version="1.0" encoding="utf-8"?>
 <p:sldLayout xmlns:a="http://schemas.openxmlformats.org/drawingml/2006/main" xmlns:r="http://schemas.openxmlformats.org/officeDocument/2006/relationships" xmlns:p="http://schemas.openxmlformats.org/presentationml/2006/main" matchingName="Caption">
   <p:cSld name="CAPTION_ONLY">
     <p:spTree>
@@ -5050,6 +6134,370 @@
       <p:sp>
         <p:nvSpPr>
           <p:cNvPr id="43" name="Google Shape;43;p10"/>
+          <p:cNvSpPr txBox="1">
+            <a:spLocks noGrp="1"/>
+          </p:cNvSpPr>
+          <p:nvPr>
+            <p:ph type="sldNum" idx="12"/>
+          </p:nvPr>
+        </p:nvSpPr>
+        <p:spPr>
+          <a:xfrm>
+            <a:off x="8472458" y="4663217"/>
+            <a:ext cx="548700" cy="393600"/>
+          </a:xfrm>
+          <a:prstGeom prst="rect">
+            <a:avLst/>
+          </a:prstGeom>
+        </p:spPr>
+        <p:txBody>
+          <a:bodyPr spcFirstLastPara="1" wrap="square" lIns="91425" tIns="91425" rIns="91425" bIns="91425" anchor="ctr" anchorCtr="0">
+            <a:normAutofit/>
+          </a:bodyPr>
+          <a:lstStyle>
+            <a:lvl1pPr lvl="0">
+              <a:buNone/>
+              <a:defRPr/>
+            </a:lvl1pPr>
+            <a:lvl2pPr lvl="1">
+              <a:buNone/>
+              <a:defRPr/>
+            </a:lvl2pPr>
+            <a:lvl3pPr lvl="2">
+              <a:buNone/>
+              <a:defRPr/>
+            </a:lvl3pPr>
+            <a:lvl4pPr lvl="3">
+              <a:buNone/>
+              <a:defRPr/>
+            </a:lvl4pPr>
+            <a:lvl5pPr lvl="4">
+              <a:buNone/>
+              <a:defRPr/>
+            </a:lvl5pPr>
+            <a:lvl6pPr lvl="5">
+              <a:buNone/>
+              <a:defRPr/>
+            </a:lvl6pPr>
+            <a:lvl7pPr lvl="6">
+              <a:buNone/>
+              <a:defRPr/>
+            </a:lvl7pPr>
+            <a:lvl8pPr lvl="7">
+              <a:buNone/>
+              <a:defRPr/>
+            </a:lvl8pPr>
+            <a:lvl9pPr lvl="8">
+              <a:buNone/>
+              <a:defRPr/>
+            </a:lvl9pPr>
+          </a:lstStyle>
+          <a:p>
+            <a:pPr marL="0" lvl="0" indent="0" algn="r" rtl="0">
+              <a:spcBef>
+                <a:spcPts val="0"/>
+              </a:spcBef>
+              <a:spcAft>
+                <a:spcPts val="0"/>
+              </a:spcAft>
+              <a:buNone/>
+            </a:pPr>
+            <a:fld id="{00000000-1234-1234-1234-123412341234}" type="slidenum">
+              <a:rPr lang="en-GB"/>
+              <a:t>‹#›</a:t>
+            </a:fld>
+            <a:endParaRPr lang="en-GB"/>
+          </a:p>
+        </p:txBody>
+      </p:sp>
+    </p:spTree>
+  </p:cSld>
+  <p:clrMapOvr>
+    <a:masterClrMapping/>
+  </p:clrMapOvr>
+</p:sldLayout>
+</file>
+
+<file path=ppt/slideLayouts/slideLayout9.xml><?xml version="1.0" encoding="utf-8"?>
+<p:sldLayout xmlns:a="http://schemas.openxmlformats.org/drawingml/2006/main" xmlns:r="http://schemas.openxmlformats.org/officeDocument/2006/relationships" xmlns:p="http://schemas.openxmlformats.org/presentationml/2006/main" matchingName="Big number">
+  <p:cSld name="BIG_NUMBER">
+    <p:spTree>
+      <p:nvGrpSpPr>
+        <p:cNvPr id="1" name="Shape 44"/>
+        <p:cNvGrpSpPr/>
+        <p:nvPr/>
+      </p:nvGrpSpPr>
+      <p:grpSpPr>
+        <a:xfrm>
+          <a:off x="0" y="0"/>
+          <a:ext cx="0" cy="0"/>
+          <a:chOff x="0" y="0"/>
+          <a:chExt cx="0" cy="0"/>
+        </a:xfrm>
+      </p:grpSpPr>
+      <p:sp>
+        <p:nvSpPr>
+          <p:cNvPr id="45" name="Google Shape;45;p11"/>
+          <p:cNvSpPr txBox="1">
+            <a:spLocks noGrp="1"/>
+          </p:cNvSpPr>
+          <p:nvPr>
+            <p:ph type="title" hasCustomPrompt="1"/>
+          </p:nvPr>
+        </p:nvSpPr>
+        <p:spPr>
+          <a:xfrm>
+            <a:off x="311700" y="1106125"/>
+            <a:ext cx="8520600" cy="1963500"/>
+          </a:xfrm>
+          <a:prstGeom prst="rect">
+            <a:avLst/>
+          </a:prstGeom>
+        </p:spPr>
+        <p:txBody>
+          <a:bodyPr spcFirstLastPara="1" wrap="square" lIns="91425" tIns="91425" rIns="91425" bIns="91425" anchor="b" anchorCtr="0">
+            <a:normAutofit/>
+          </a:bodyPr>
+          <a:lstStyle>
+            <a:lvl1pPr lvl="0" algn="ctr">
+              <a:spcBef>
+                <a:spcPts val="0"/>
+              </a:spcBef>
+              <a:spcAft>
+                <a:spcPts val="0"/>
+              </a:spcAft>
+              <a:buSzPts val="12000"/>
+              <a:buNone/>
+              <a:defRPr sz="12000"/>
+            </a:lvl1pPr>
+            <a:lvl2pPr lvl="1" algn="ctr">
+              <a:spcBef>
+                <a:spcPts val="0"/>
+              </a:spcBef>
+              <a:spcAft>
+                <a:spcPts val="0"/>
+              </a:spcAft>
+              <a:buSzPts val="12000"/>
+              <a:buNone/>
+              <a:defRPr sz="12000"/>
+            </a:lvl2pPr>
+            <a:lvl3pPr lvl="2" algn="ctr">
+              <a:spcBef>
+                <a:spcPts val="0"/>
+              </a:spcBef>
+              <a:spcAft>
+                <a:spcPts val="0"/>
+              </a:spcAft>
+              <a:buSzPts val="12000"/>
+              <a:buNone/>
+              <a:defRPr sz="12000"/>
+            </a:lvl3pPr>
+            <a:lvl4pPr lvl="3" algn="ctr">
+              <a:spcBef>
+                <a:spcPts val="0"/>
+              </a:spcBef>
+              <a:spcAft>
+                <a:spcPts val="0"/>
+              </a:spcAft>
+              <a:buSzPts val="12000"/>
+              <a:buNone/>
+              <a:defRPr sz="12000"/>
+            </a:lvl4pPr>
+            <a:lvl5pPr lvl="4" algn="ctr">
+              <a:spcBef>
+                <a:spcPts val="0"/>
+              </a:spcBef>
+              <a:spcAft>
+                <a:spcPts val="0"/>
+              </a:spcAft>
+              <a:buSzPts val="12000"/>
+              <a:buNone/>
+              <a:defRPr sz="12000"/>
+            </a:lvl5pPr>
+            <a:lvl6pPr lvl="5" algn="ctr">
+              <a:spcBef>
+                <a:spcPts val="0"/>
+              </a:spcBef>
+              <a:spcAft>
+                <a:spcPts val="0"/>
+              </a:spcAft>
+              <a:buSzPts val="12000"/>
+              <a:buNone/>
+              <a:defRPr sz="12000"/>
+            </a:lvl6pPr>
+            <a:lvl7pPr lvl="6" algn="ctr">
+              <a:spcBef>
+                <a:spcPts val="0"/>
+              </a:spcBef>
+              <a:spcAft>
+                <a:spcPts val="0"/>
+              </a:spcAft>
+              <a:buSzPts val="12000"/>
+              <a:buNone/>
+              <a:defRPr sz="12000"/>
+            </a:lvl7pPr>
+            <a:lvl8pPr lvl="7" algn="ctr">
+              <a:spcBef>
+                <a:spcPts val="0"/>
+              </a:spcBef>
+              <a:spcAft>
+                <a:spcPts val="0"/>
+              </a:spcAft>
+              <a:buSzPts val="12000"/>
+              <a:buNone/>
+              <a:defRPr sz="12000"/>
+            </a:lvl8pPr>
+            <a:lvl9pPr lvl="8" algn="ctr">
+              <a:spcBef>
+                <a:spcPts val="0"/>
+              </a:spcBef>
+              <a:spcAft>
+                <a:spcPts val="0"/>
+              </a:spcAft>
+              <a:buSzPts val="12000"/>
+              <a:buNone/>
+              <a:defRPr sz="12000"/>
+            </a:lvl9pPr>
+          </a:lstStyle>
+          <a:p>
+            <a:r>
+              <a:t>xx%</a:t>
+            </a:r>
+          </a:p>
+        </p:txBody>
+      </p:sp>
+      <p:sp>
+        <p:nvSpPr>
+          <p:cNvPr id="46" name="Google Shape;46;p11"/>
+          <p:cNvSpPr txBox="1">
+            <a:spLocks noGrp="1"/>
+          </p:cNvSpPr>
+          <p:nvPr>
+            <p:ph type="body" idx="1"/>
+          </p:nvPr>
+        </p:nvSpPr>
+        <p:spPr>
+          <a:xfrm>
+            <a:off x="311700" y="3152225"/>
+            <a:ext cx="8520600" cy="1300800"/>
+          </a:xfrm>
+          <a:prstGeom prst="rect">
+            <a:avLst/>
+          </a:prstGeom>
+        </p:spPr>
+        <p:txBody>
+          <a:bodyPr spcFirstLastPara="1" wrap="square" lIns="91425" tIns="91425" rIns="91425" bIns="91425" anchor="t" anchorCtr="0">
+            <a:normAutofit/>
+          </a:bodyPr>
+          <a:lstStyle>
+            <a:lvl1pPr marL="457200" lvl="0" indent="-342900" algn="ctr">
+              <a:spcBef>
+                <a:spcPts val="0"/>
+              </a:spcBef>
+              <a:spcAft>
+                <a:spcPts val="0"/>
+              </a:spcAft>
+              <a:buSzPts val="1800"/>
+              <a:buChar char="●"/>
+              <a:defRPr/>
+            </a:lvl1pPr>
+            <a:lvl2pPr marL="914400" lvl="1" indent="-317500" algn="ctr">
+              <a:spcBef>
+                <a:spcPts val="0"/>
+              </a:spcBef>
+              <a:spcAft>
+                <a:spcPts val="0"/>
+              </a:spcAft>
+              <a:buSzPts val="1400"/>
+              <a:buChar char="○"/>
+              <a:defRPr/>
+            </a:lvl2pPr>
+            <a:lvl3pPr marL="1371600" lvl="2" indent="-317500" algn="ctr">
+              <a:spcBef>
+                <a:spcPts val="0"/>
+              </a:spcBef>
+              <a:spcAft>
+                <a:spcPts val="0"/>
+              </a:spcAft>
+              <a:buSzPts val="1400"/>
+              <a:buChar char="■"/>
+              <a:defRPr/>
+            </a:lvl3pPr>
+            <a:lvl4pPr marL="1828800" lvl="3" indent="-317500" algn="ctr">
+              <a:spcBef>
+                <a:spcPts val="0"/>
+              </a:spcBef>
+              <a:spcAft>
+                <a:spcPts val="0"/>
+              </a:spcAft>
+              <a:buSzPts val="1400"/>
+              <a:buChar char="●"/>
+              <a:defRPr/>
+            </a:lvl4pPr>
+            <a:lvl5pPr marL="2286000" lvl="4" indent="-317500" algn="ctr">
+              <a:spcBef>
+                <a:spcPts val="0"/>
+              </a:spcBef>
+              <a:spcAft>
+                <a:spcPts val="0"/>
+              </a:spcAft>
+              <a:buSzPts val="1400"/>
+              <a:buChar char="○"/>
+              <a:defRPr/>
+            </a:lvl5pPr>
+            <a:lvl6pPr marL="2743200" lvl="5" indent="-317500" algn="ctr">
+              <a:spcBef>
+                <a:spcPts val="0"/>
+              </a:spcBef>
+              <a:spcAft>
+                <a:spcPts val="0"/>
+              </a:spcAft>
+              <a:buSzPts val="1400"/>
+              <a:buChar char="■"/>
+              <a:defRPr/>
+            </a:lvl6pPr>
+            <a:lvl7pPr marL="3200400" lvl="6" indent="-317500" algn="ctr">
+              <a:spcBef>
+                <a:spcPts val="0"/>
+              </a:spcBef>
+              <a:spcAft>
+                <a:spcPts val="0"/>
+              </a:spcAft>
+              <a:buSzPts val="1400"/>
+              <a:buChar char="●"/>
+              <a:defRPr/>
+            </a:lvl7pPr>
+            <a:lvl8pPr marL="3657600" lvl="7" indent="-317500" algn="ctr">
+              <a:spcBef>
+                <a:spcPts val="0"/>
+              </a:spcBef>
+              <a:spcAft>
+                <a:spcPts val="0"/>
+              </a:spcAft>
+              <a:buSzPts val="1400"/>
+              <a:buChar char="○"/>
+              <a:defRPr/>
+            </a:lvl8pPr>
+            <a:lvl9pPr marL="4114800" lvl="8" indent="-317500" algn="ctr">
+              <a:spcBef>
+                <a:spcPts val="0"/>
+              </a:spcBef>
+              <a:spcAft>
+                <a:spcPts val="0"/>
+              </a:spcAft>
+              <a:buSzPts val="1400"/>
+              <a:buChar char="■"/>
+              <a:defRPr/>
+            </a:lvl9pPr>
+          </a:lstStyle>
+          <a:p>
+            <a:endParaRPr/>
+          </a:p>
+        </p:txBody>
+      </p:sp>
+      <p:sp>
+        <p:nvSpPr>
+          <p:cNvPr id="47" name="Google Shape;47;p11"/>
           <p:cNvSpPr txBox="1">
             <a:spLocks noGrp="1"/>
           </p:cNvSpPr>
@@ -5702,16 +7150,15 @@
   <p:clrMap bg1="lt1" tx1="dk1" bg2="dk2" tx2="lt2" accent1="accent1" accent2="accent2" accent3="accent3" accent4="accent4" accent5="accent5" accent6="accent6" hlink="hlink" folHlink="folHlink"/>
   <p:sldLayoutIdLst>
     <p:sldLayoutId id="2147483649" r:id="rId1"/>
-    <p:sldLayoutId id="2147483650" r:id="rId2"/>
-    <p:sldLayoutId id="2147483651" r:id="rId3"/>
-    <p:sldLayoutId id="2147483652" r:id="rId4"/>
-    <p:sldLayoutId id="2147483653" r:id="rId5"/>
-    <p:sldLayoutId id="2147483654" r:id="rId6"/>
-    <p:sldLayoutId id="2147483655" r:id="rId7"/>
-    <p:sldLayoutId id="2147483656" r:id="rId8"/>
-    <p:sldLayoutId id="2147483657" r:id="rId9"/>
-    <p:sldLayoutId id="2147483658" r:id="rId10"/>
-    <p:sldLayoutId id="2147483659" r:id="rId11"/>
+    <p:sldLayoutId id="2147483651" r:id="rId2"/>
+    <p:sldLayoutId id="2147483652" r:id="rId3"/>
+    <p:sldLayoutId id="2147483653" r:id="rId4"/>
+    <p:sldLayoutId id="2147483654" r:id="rId5"/>
+    <p:sldLayoutId id="2147483655" r:id="rId6"/>
+    <p:sldLayoutId id="2147483656" r:id="rId7"/>
+    <p:sldLayoutId id="2147483657" r:id="rId8"/>
+    <p:sldLayoutId id="2147483658" r:id="rId9"/>
+    <p:sldLayoutId id="2147483659" r:id="rId10"/>
   </p:sldLayoutIdLst>
   <p:hf sldNum="0" hdr="0" ftr="0" dt="0"/>
   <p:txStyles>
@@ -6465,30 +7912,14 @@
             <a:r>
               <a:rPr lang="en-GB" dirty="0">
                 <a:solidFill>
-                  <a:srgbClr val="980000"/>
+                  <a:srgbClr val="00B050"/>
                 </a:solidFill>
               </a:rPr>
-              <a:t>Instructions </a:t>
-            </a:r>
-            <a:r>
-              <a:rPr lang="en-GB">
-                <a:solidFill>
-                  <a:srgbClr val="980000"/>
-                </a:solidFill>
-              </a:rPr>
-              <a:t>for Assigning </a:t>
-            </a:r>
-            <a:r>
-              <a:rPr lang="en-GB" dirty="0">
-                <a:solidFill>
-                  <a:srgbClr val="980000"/>
-                </a:solidFill>
-              </a:rPr>
-              <a:t>Papers to Session Chairs</a:t>
+              <a:t>Instructions for Assigning Papers to Session Chairs</a:t>
             </a:r>
             <a:endParaRPr dirty="0">
               <a:solidFill>
-                <a:srgbClr val="980000"/>
+                <a:srgbClr val="00B050"/>
               </a:solidFill>
             </a:endParaRPr>
           </a:p>
@@ -6560,8 +7991,8 @@
         </p:nvGrpSpPr>
         <p:grpSpPr>
           <a:xfrm>
-            <a:off x="2065065" y="175145"/>
-            <a:ext cx="5668492" cy="2223809"/>
+            <a:off x="63199" y="2693202"/>
+            <a:ext cx="5403104" cy="2174401"/>
             <a:chOff x="1852566" y="137554"/>
             <a:chExt cx="5668492" cy="2223809"/>
           </a:xfrm>
@@ -6650,10 +8081,10 @@
             <p:nvPr/>
           </p:nvPicPr>
           <p:blipFill>
-            <a:blip r:embed="rId4">
+            <a:blip>
               <a:extLst>
                 <a:ext uri="{96DAC541-7B7A-43D3-8B79-37D633B846F1}">
-                  <asvg:svgBlip xmlns:asvg="http://schemas.microsoft.com/office/drawing/2016/SVG/main" r:embed="rId5"/>
+                  <asvg:svgBlip xmlns:asvg="http://schemas.microsoft.com/office/drawing/2016/SVG/main" r:embed="rId4"/>
                 </a:ext>
               </a:extLst>
             </a:blip>
@@ -6680,7 +8111,7 @@
         </p:nvGrpSpPr>
         <p:grpSpPr>
           <a:xfrm>
-            <a:off x="4909602" y="2569983"/>
+            <a:off x="5535791" y="1162937"/>
             <a:ext cx="3555058" cy="2321170"/>
             <a:chOff x="2794471" y="2508335"/>
             <a:chExt cx="3555058" cy="2321170"/>
@@ -6695,7 +8126,7 @@
             <p:nvPr/>
           </p:nvPicPr>
           <p:blipFill rotWithShape="1">
-            <a:blip r:embed="rId6"/>
+            <a:blip r:embed="rId5"/>
             <a:srcRect t="18810" b="13247"/>
             <a:stretch>
               <a:fillRect/>
@@ -6771,10 +8202,10 @@
             <p:nvPr/>
           </p:nvPicPr>
           <p:blipFill>
-            <a:blip r:embed="rId7">
+            <a:blip>
               <a:extLst>
                 <a:ext uri="{96DAC541-7B7A-43D3-8B79-37D633B846F1}">
-                  <asvg:svgBlip xmlns:asvg="http://schemas.microsoft.com/office/drawing/2016/SVG/main" r:embed="rId8"/>
+                  <asvg:svgBlip xmlns:asvg="http://schemas.microsoft.com/office/drawing/2016/SVG/main" r:embed="rId6"/>
                 </a:ext>
               </a:extLst>
             </a:blip>
@@ -6801,7 +8232,7 @@
         </p:nvSpPr>
         <p:spPr>
           <a:xfrm>
-            <a:off x="311700" y="2569983"/>
+            <a:off x="514900" y="585434"/>
             <a:ext cx="4260300" cy="572700"/>
           </a:xfrm>
           <a:prstGeom prst="rect">
@@ -7067,14 +8498,14 @@
             <a:r>
               <a:rPr lang="en-US" b="1" dirty="0">
                 <a:solidFill>
-                  <a:srgbClr val="980000"/>
+                  <a:srgbClr val="00B050"/>
                 </a:solidFill>
               </a:rPr>
               <a:t>2. Paper Assignment (B) </a:t>
             </a:r>
             <a:endParaRPr lang="en-US" dirty="0">
               <a:solidFill>
-                <a:srgbClr val="FF0000"/>
+                <a:srgbClr val="00B050"/>
               </a:solidFill>
             </a:endParaRPr>
           </a:p>
@@ -7088,7 +8519,7 @@
         </p:nvSpPr>
         <p:spPr>
           <a:xfrm>
-            <a:off x="311701" y="3250968"/>
+            <a:off x="514900" y="1160995"/>
             <a:ext cx="4463499" cy="1545569"/>
           </a:xfrm>
           <a:prstGeom prst="rect">
@@ -7421,14 +8852,14 @@
           <p:nvPr/>
         </p:nvPicPr>
         <p:blipFill>
-          <a:blip r:embed="rId9"/>
+          <a:blip r:embed="rId7"/>
           <a:stretch>
             <a:fillRect/>
           </a:stretch>
         </p:blipFill>
         <p:spPr>
           <a:xfrm>
-            <a:off x="3339835" y="3143675"/>
+            <a:off x="3540802" y="1188226"/>
             <a:ext cx="482600" cy="444500"/>
           </a:xfrm>
           <a:prstGeom prst="rect">
@@ -7445,10 +8876,10 @@
           <p:nvPr/>
         </p:nvPicPr>
         <p:blipFill>
-          <a:blip r:embed="rId10">
+          <a:blip>
             <a:extLst>
               <a:ext uri="{96DAC541-7B7A-43D3-8B79-37D633B846F1}">
-                <asvg:svgBlip xmlns:asvg="http://schemas.microsoft.com/office/drawing/2016/SVG/main" r:embed="rId11"/>
+                <asvg:svgBlip xmlns:asvg="http://schemas.microsoft.com/office/drawing/2016/SVG/main" r:embed="rId8"/>
               </a:ext>
             </a:extLst>
           </a:blip>
@@ -7457,9 +8888,9 @@
           </a:stretch>
         </p:blipFill>
         <p:spPr>
-          <a:xfrm rot="2578316">
-            <a:off x="7986692" y="1476580"/>
-            <a:ext cx="914400" cy="914400"/>
+          <a:xfrm rot="11824783" flipH="1">
+            <a:off x="5500806" y="3634220"/>
+            <a:ext cx="958535" cy="914400"/>
           </a:xfrm>
           <a:prstGeom prst="rect">
             <a:avLst/>
@@ -7503,8 +8934,8 @@
         </p:nvSpPr>
         <p:spPr>
           <a:xfrm>
-            <a:off x="146447" y="304951"/>
-            <a:ext cx="8997553" cy="572700"/>
+            <a:off x="477299" y="238159"/>
+            <a:ext cx="6148845" cy="572700"/>
           </a:xfrm>
         </p:spPr>
         <p:txBody>
@@ -7516,7 +8947,7 @@
             <a:r>
               <a:rPr lang="en-US" b="1" dirty="0">
                 <a:solidFill>
-                  <a:srgbClr val="980000"/>
+                  <a:srgbClr val="00B050"/>
                 </a:solidFill>
               </a:rPr>
               <a:t>3. Update Session Chair Names for Paper Assignment(A)</a:t>
@@ -7524,11 +8955,15 @@
             <a:br>
               <a:rPr lang="en-US" dirty="0">
                 <a:solidFill>
-                  <a:srgbClr val="FF0000"/>
+                  <a:srgbClr val="00B050"/>
                 </a:solidFill>
               </a:rPr>
             </a:br>
-            <a:endParaRPr lang="en-US" dirty="0"/>
+            <a:endParaRPr lang="en-US" dirty="0">
+              <a:solidFill>
+                <a:srgbClr val="00B050"/>
+              </a:solidFill>
+            </a:endParaRPr>
           </a:p>
         </p:txBody>
       </p:sp>
@@ -7544,8 +8979,8 @@
         </p:nvSpPr>
         <p:spPr>
           <a:xfrm>
-            <a:off x="-294290" y="1017725"/>
-            <a:ext cx="8916383" cy="3416400"/>
+            <a:off x="-294290" y="1120391"/>
+            <a:ext cx="8916383" cy="3313734"/>
           </a:xfrm>
         </p:spPr>
         <p:txBody>
@@ -7623,7 +9058,7 @@
         </p:nvGrpSpPr>
         <p:grpSpPr>
           <a:xfrm>
-            <a:off x="685800" y="1563092"/>
+            <a:off x="685800" y="1683672"/>
             <a:ext cx="7772400" cy="3364249"/>
             <a:chOff x="685800" y="1563092"/>
             <a:chExt cx="7772400" cy="3364249"/>
@@ -7713,10 +9148,10 @@
             <p:nvPr/>
           </p:nvPicPr>
           <p:blipFill>
-            <a:blip r:embed="rId3">
+            <a:blip>
               <a:extLst>
                 <a:ext uri="{96DAC541-7B7A-43D3-8B79-37D633B846F1}">
-                  <asvg:svgBlip xmlns:asvg="http://schemas.microsoft.com/office/drawing/2016/SVG/main" r:embed="rId4"/>
+                  <asvg:svgBlip xmlns:asvg="http://schemas.microsoft.com/office/drawing/2016/SVG/main" r:embed="rId3"/>
                 </a:ext>
               </a:extLst>
             </a:blip>
@@ -7772,8 +9207,8 @@
         </p:nvSpPr>
         <p:spPr>
           <a:xfrm>
-            <a:off x="311700" y="899085"/>
-            <a:ext cx="8520600" cy="3416400"/>
+            <a:off x="311700" y="1095269"/>
+            <a:ext cx="8520600" cy="3220215"/>
           </a:xfrm>
         </p:spPr>
         <p:txBody>
@@ -7816,7 +9251,7 @@
         </p:blipFill>
         <p:spPr>
           <a:xfrm>
-            <a:off x="1429268" y="943152"/>
+            <a:off x="1459413" y="1139094"/>
             <a:ext cx="444500" cy="431800"/>
           </a:xfrm>
           <a:prstGeom prst="rect">
@@ -7832,7 +9267,7 @@
         </p:nvGrpSpPr>
         <p:grpSpPr>
           <a:xfrm>
-            <a:off x="1740118" y="1465635"/>
+            <a:off x="1740118" y="1706795"/>
             <a:ext cx="5663763" cy="3277832"/>
             <a:chOff x="1241534" y="1728993"/>
             <a:chExt cx="5663763" cy="3277832"/>
@@ -7922,10 +9357,10 @@
             <p:nvPr/>
           </p:nvPicPr>
           <p:blipFill>
-            <a:blip r:embed="rId4">
+            <a:blip>
               <a:extLst>
                 <a:ext uri="{96DAC541-7B7A-43D3-8B79-37D633B846F1}">
-                  <asvg:svgBlip xmlns:asvg="http://schemas.microsoft.com/office/drawing/2016/SVG/main" r:embed="rId5"/>
+                  <asvg:svgBlip xmlns:asvg="http://schemas.microsoft.com/office/drawing/2016/SVG/main" r:embed="rId4"/>
                 </a:ext>
               </a:extLst>
             </a:blip>
@@ -7956,8 +9391,8 @@
         </p:nvSpPr>
         <p:spPr>
           <a:xfrm>
-            <a:off x="146447" y="304951"/>
-            <a:ext cx="8997553" cy="572700"/>
+            <a:off x="412727" y="207610"/>
+            <a:ext cx="6053141" cy="572700"/>
           </a:xfrm>
         </p:spPr>
         <p:txBody>
@@ -7969,7 +9404,7 @@
             <a:r>
               <a:rPr lang="en-US" b="1" dirty="0">
                 <a:solidFill>
-                  <a:srgbClr val="980000"/>
+                  <a:srgbClr val="00B050"/>
                 </a:solidFill>
               </a:rPr>
               <a:t>3. Update Session Chair Names for Paper Assignment(B)</a:t>
@@ -7977,11 +9412,15 @@
             <a:br>
               <a:rPr lang="en-US" dirty="0">
                 <a:solidFill>
-                  <a:srgbClr val="FF0000"/>
+                  <a:srgbClr val="00B050"/>
                 </a:solidFill>
               </a:rPr>
             </a:br>
-            <a:endParaRPr lang="en-US" dirty="0"/>
+            <a:endParaRPr lang="en-US" dirty="0">
+              <a:solidFill>
+                <a:srgbClr val="00B050"/>
+              </a:solidFill>
+            </a:endParaRPr>
           </a:p>
         </p:txBody>
       </p:sp>
@@ -8022,8 +9461,8 @@
         </p:nvSpPr>
         <p:spPr>
           <a:xfrm>
-            <a:off x="168481" y="1012174"/>
-            <a:ext cx="8520600" cy="3416400"/>
+            <a:off x="168481" y="1085222"/>
+            <a:ext cx="8520600" cy="3343352"/>
           </a:xfrm>
         </p:spPr>
         <p:txBody>
@@ -8031,7 +9470,11 @@
           <a:lstStyle/>
           <a:p>
             <a:r>
-              <a:rPr lang="en-US" dirty="0"/>
+              <a:rPr lang="en-US" dirty="0">
+                <a:solidFill>
+                  <a:schemeClr val="tx1"/>
+                </a:solidFill>
+              </a:rPr>
               <a:t>This name will appear in the "PC Member" column and will be used to identify the corresponding Session Chair during paper assignment.</a:t>
             </a:r>
           </a:p>
@@ -8226,10 +9669,10 @@
           <p:nvPr/>
         </p:nvPicPr>
         <p:blipFill>
-          <a:blip r:embed="rId4">
+          <a:blip>
             <a:extLst>
               <a:ext uri="{96DAC541-7B7A-43D3-8B79-37D633B846F1}">
-                <asvg:svgBlip xmlns:asvg="http://schemas.microsoft.com/office/drawing/2016/SVG/main" r:embed="rId5"/>
+                <asvg:svgBlip xmlns:asvg="http://schemas.microsoft.com/office/drawing/2016/SVG/main" r:embed="rId4"/>
               </a:ext>
             </a:extLst>
           </a:blip>
@@ -8259,8 +9702,8 @@
         </p:nvSpPr>
         <p:spPr>
           <a:xfrm>
-            <a:off x="146447" y="304951"/>
-            <a:ext cx="8997553" cy="572700"/>
+            <a:off x="488092" y="225435"/>
+            <a:ext cx="6010702" cy="572700"/>
           </a:xfrm>
         </p:spPr>
         <p:txBody>
@@ -8272,7 +9715,7 @@
             <a:r>
               <a:rPr lang="en-US" b="1" dirty="0">
                 <a:solidFill>
-                  <a:srgbClr val="980000"/>
+                  <a:srgbClr val="00B050"/>
                 </a:solidFill>
               </a:rPr>
               <a:t>3. Update Session Chair Names for Paper Assignment(C)</a:t>
@@ -8280,11 +9723,15 @@
             <a:br>
               <a:rPr lang="en-US" dirty="0">
                 <a:solidFill>
-                  <a:srgbClr val="FF0000"/>
+                  <a:srgbClr val="00B050"/>
                 </a:solidFill>
               </a:rPr>
             </a:br>
-            <a:endParaRPr lang="en-US" dirty="0"/>
+            <a:endParaRPr lang="en-US" dirty="0">
+              <a:solidFill>
+                <a:srgbClr val="00B050"/>
+              </a:solidFill>
+            </a:endParaRPr>
           </a:p>
         </p:txBody>
       </p:sp>
@@ -8348,16 +9795,16 @@
               <a:buNone/>
             </a:pPr>
             <a:r>
-              <a:rPr lang="en-GB" b="1">
+              <a:rPr lang="en-GB" b="1" dirty="0">
                 <a:solidFill>
-                  <a:srgbClr val="980000"/>
+                  <a:srgbClr val="00B050"/>
                 </a:solidFill>
               </a:rPr>
               <a:t>Outline</a:t>
             </a:r>
-            <a:endParaRPr b="1">
+            <a:endParaRPr b="1" dirty="0">
               <a:solidFill>
-                <a:srgbClr val="980000"/>
+                <a:srgbClr val="00B050"/>
               </a:solidFill>
             </a:endParaRPr>
           </a:p>
@@ -8574,7 +10021,7 @@
           </a:bodyPr>
           <a:lstStyle/>
           <a:p>
-            <a:pPr marL="457200" lvl="0" indent="-381000" algn="l" rtl="0">
+            <a:pPr marL="76200" lvl="0" algn="l" rtl="0">
               <a:lnSpc>
                 <a:spcPct val="115000"/>
               </a:lnSpc>
@@ -8588,19 +10035,18 @@
                 <a:srgbClr val="980000"/>
               </a:buClr>
               <a:buSzPts val="2400"/>
-              <a:buAutoNum type="arabicPeriod"/>
             </a:pPr>
             <a:r>
               <a:rPr lang="en-GB" sz="2400" b="1" dirty="0">
                 <a:solidFill>
-                  <a:srgbClr val="980000"/>
+                  <a:srgbClr val="00B050"/>
                 </a:solidFill>
               </a:rPr>
-              <a:t>Account Login (A) </a:t>
+              <a:t>1. Account Login (A) </a:t>
             </a:r>
             <a:endParaRPr sz="2400" b="1" dirty="0">
               <a:solidFill>
-                <a:srgbClr val="980000"/>
+                <a:srgbClr val="00B050"/>
               </a:solidFill>
             </a:endParaRPr>
           </a:p>
@@ -9140,7 +10586,7 @@
             </a:lvl9pPr>
           </a:lstStyle>
           <a:p>
-            <a:pPr marL="457200" indent="-381000">
+            <a:pPr marL="76200">
               <a:lnSpc>
                 <a:spcPct val="115000"/>
               </a:lnSpc>
@@ -9148,22 +10594,15 @@
                 <a:srgbClr val="980000"/>
               </a:buClr>
               <a:buSzPts val="2400"/>
-              <a:buFont typeface="Arial" panose="020B0604020202020204"/>
-              <a:buAutoNum type="arabicPeriod"/>
             </a:pPr>
             <a:r>
               <a:rPr lang="en-US" sz="2400" b="1" dirty="0">
                 <a:solidFill>
-                  <a:srgbClr val="980000"/>
+                  <a:srgbClr val="00B050"/>
                 </a:solidFill>
               </a:rPr>
-              <a:t>Account Login (B)</a:t>
+              <a:t>1. Account Login (B)</a:t>
             </a:r>
-            <a:endParaRPr lang="en-US" sz="2400" b="1" dirty="0">
-              <a:solidFill>
-                <a:schemeClr val="accent4"/>
-              </a:solidFill>
-            </a:endParaRPr>
           </a:p>
         </p:txBody>
       </p:sp>
@@ -9202,8 +10641,8 @@
         </p:blipFill>
         <p:spPr>
           <a:xfrm>
-            <a:off x="4914323" y="836925"/>
-            <a:ext cx="3846316" cy="3731950"/>
+            <a:off x="4914323" y="1174995"/>
+            <a:ext cx="3846316" cy="3393880"/>
           </a:xfrm>
           <a:prstGeom prst="rect">
             <a:avLst/>
@@ -9297,7 +10736,7 @@
           </a:bodyPr>
           <a:lstStyle/>
           <a:p>
-            <a:pPr marL="457200" lvl="0" indent="-381000" algn="l" rtl="0">
+            <a:pPr marL="76200" lvl="0" algn="l" rtl="0">
               <a:lnSpc>
                 <a:spcPct val="115000"/>
               </a:lnSpc>
@@ -9311,19 +10750,18 @@
                 <a:srgbClr val="980000"/>
               </a:buClr>
               <a:buSzPts val="2400"/>
-              <a:buAutoNum type="arabicPeriod"/>
             </a:pPr>
             <a:r>
               <a:rPr lang="en-GB" sz="2400" b="1" dirty="0">
                 <a:solidFill>
-                  <a:srgbClr val="980000"/>
+                  <a:srgbClr val="00B050"/>
                 </a:solidFill>
               </a:rPr>
-              <a:t>Account Login (C) </a:t>
+              <a:t>1. Account Login (C) </a:t>
             </a:r>
             <a:endParaRPr sz="2400" b="1" dirty="0">
               <a:solidFill>
-                <a:srgbClr val="980000"/>
+                <a:srgbClr val="00B050"/>
               </a:solidFill>
             </a:endParaRPr>
           </a:p>
@@ -9341,8 +10779,8 @@
         </p:nvSpPr>
         <p:spPr>
           <a:xfrm>
-            <a:off x="331191" y="950462"/>
-            <a:ext cx="4496986" cy="572700"/>
+            <a:off x="331191" y="1120391"/>
+            <a:ext cx="4496986" cy="402770"/>
           </a:xfrm>
           <a:prstGeom prst="rect">
             <a:avLst/>
@@ -9387,7 +10825,7 @@
         </p:nvGrpSpPr>
         <p:grpSpPr>
           <a:xfrm>
-            <a:off x="2163600" y="1523162"/>
+            <a:off x="2163600" y="1625827"/>
             <a:ext cx="5087084" cy="3237807"/>
             <a:chOff x="2228282" y="1718578"/>
             <a:chExt cx="5087084" cy="3237807"/>
@@ -9478,10 +10916,10 @@
             <p:nvPr/>
           </p:nvPicPr>
           <p:blipFill>
-            <a:blip r:embed="rId4">
+            <a:blip>
               <a:extLst>
                 <a:ext uri="{96DAC541-7B7A-43D3-8B79-37D633B846F1}">
-                  <asvg:svgBlip xmlns:asvg="http://schemas.microsoft.com/office/drawing/2016/SVG/main" r:embed="rId5"/>
+                  <asvg:svgBlip xmlns:asvg="http://schemas.microsoft.com/office/drawing/2016/SVG/main" r:embed="rId4"/>
                 </a:ext>
               </a:extLst>
             </a:blip>
@@ -9527,71 +10965,6 @@
       </p:grpSpPr>
       <p:sp>
         <p:nvSpPr>
-          <p:cNvPr id="66" name="Google Shape;66;p15"/>
-          <p:cNvSpPr txBox="1">
-            <a:spLocks noGrp="1"/>
-          </p:cNvSpPr>
-          <p:nvPr>
-            <p:ph type="title"/>
-          </p:nvPr>
-        </p:nvSpPr>
-        <p:spPr>
-          <a:xfrm>
-            <a:off x="156125" y="119905"/>
-            <a:ext cx="8520600" cy="572700"/>
-          </a:xfrm>
-          <a:prstGeom prst="rect">
-            <a:avLst/>
-          </a:prstGeom>
-        </p:spPr>
-        <p:txBody>
-          <a:bodyPr spcFirstLastPara="1" wrap="square" lIns="91425" tIns="91425" rIns="91425" bIns="91425" anchor="t" anchorCtr="0">
-            <a:normAutofit fontScale="90000"/>
-          </a:bodyPr>
-          <a:lstStyle/>
-          <a:p>
-            <a:pPr marL="457200" lvl="0" indent="-381000" algn="l" rtl="0">
-              <a:lnSpc>
-                <a:spcPct val="115000"/>
-              </a:lnSpc>
-              <a:spcBef>
-                <a:spcPts val="0"/>
-              </a:spcBef>
-              <a:spcAft>
-                <a:spcPts val="0"/>
-              </a:spcAft>
-              <a:buClr>
-                <a:srgbClr val="980000"/>
-              </a:buClr>
-              <a:buSzPts val="2400"/>
-              <a:buAutoNum type="arabicPeriod"/>
-            </a:pPr>
-            <a:r>
-              <a:rPr lang="en-GB" sz="2400" b="1" dirty="0">
-                <a:solidFill>
-                  <a:srgbClr val="980000"/>
-                </a:solidFill>
-              </a:rPr>
-              <a:t>Account login (D)</a:t>
-            </a:r>
-            <a:r>
-              <a:rPr lang="en-US" altLang="en-GB" sz="2400" b="1" dirty="0">
-                <a:solidFill>
-                  <a:srgbClr val="980000"/>
-                </a:solidFill>
-              </a:rPr>
-              <a:t> </a:t>
-            </a:r>
-            <a:endParaRPr lang="en-US" altLang="en-US" sz="2400" b="1" dirty="0">
-              <a:solidFill>
-                <a:srgbClr val="980000"/>
-              </a:solidFill>
-            </a:endParaRPr>
-          </a:p>
-        </p:txBody>
-      </p:sp>
-      <p:sp>
-        <p:nvSpPr>
           <p:cNvPr id="67" name="Google Shape;67;p15"/>
           <p:cNvSpPr txBox="1">
             <a:spLocks noGrp="1"/>
@@ -9602,8 +10975,8 @@
         </p:nvSpPr>
         <p:spPr>
           <a:xfrm>
-            <a:off x="156124" y="555424"/>
-            <a:ext cx="8520600" cy="4048943"/>
+            <a:off x="156124" y="1125415"/>
+            <a:ext cx="8520600" cy="3938954"/>
           </a:xfrm>
           <a:prstGeom prst="rect">
             <a:avLst/>
@@ -9924,7 +11297,7 @@
         </p:nvGrpSpPr>
         <p:grpSpPr>
           <a:xfrm>
-            <a:off x="156124" y="1412933"/>
+            <a:off x="226462" y="1990713"/>
             <a:ext cx="8977800" cy="1633855"/>
             <a:chOff x="156124" y="1526222"/>
             <a:chExt cx="8977800" cy="1633855"/>
@@ -10026,10 +11399,10 @@
             <p:nvPr/>
           </p:nvPicPr>
           <p:blipFill>
-            <a:blip r:embed="rId5">
+            <a:blip>
               <a:extLst>
                 <a:ext uri="{96DAC541-7B7A-43D3-8B79-37D633B846F1}">
-                  <asvg:svgBlip xmlns:asvg="http://schemas.microsoft.com/office/drawing/2016/SVG/main" r:embed="rId6"/>
+                  <asvg:svgBlip xmlns:asvg="http://schemas.microsoft.com/office/drawing/2016/SVG/main" r:embed="rId5"/>
                 </a:ext>
               </a:extLst>
             </a:blip>
@@ -10048,6 +11421,68 @@
           </p:spPr>
         </p:pic>
       </p:grpSp>
+      <p:sp>
+        <p:nvSpPr>
+          <p:cNvPr id="6" name="Google Shape;102;p20">
+            <a:extLst>
+              <a:ext uri="{FF2B5EF4-FFF2-40B4-BE49-F238E27FC236}">
+                <a16:creationId xmlns:a16="http://schemas.microsoft.com/office/drawing/2014/main" id="{7C1BD01E-FFCB-3926-D9A9-AA4151856CB3}"/>
+              </a:ext>
+            </a:extLst>
+          </p:cNvPr>
+          <p:cNvSpPr txBox="1">
+            <a:spLocks noGrp="1"/>
+          </p:cNvSpPr>
+          <p:nvPr>
+            <p:ph type="title"/>
+          </p:nvPr>
+        </p:nvSpPr>
+        <p:spPr>
+          <a:xfrm>
+            <a:off x="497850" y="445025"/>
+            <a:ext cx="3331500" cy="572700"/>
+          </a:xfrm>
+          <a:prstGeom prst="rect">
+            <a:avLst/>
+          </a:prstGeom>
+        </p:spPr>
+        <p:txBody>
+          <a:bodyPr spcFirstLastPara="1" wrap="square" lIns="91425" tIns="91425" rIns="91425" bIns="91425" anchor="t" anchorCtr="0">
+            <a:normAutofit fontScale="90000"/>
+          </a:bodyPr>
+          <a:lstStyle/>
+          <a:p>
+            <a:pPr marL="76200" lvl="0" algn="l" rtl="0">
+              <a:lnSpc>
+                <a:spcPct val="115000"/>
+              </a:lnSpc>
+              <a:spcBef>
+                <a:spcPts val="0"/>
+              </a:spcBef>
+              <a:spcAft>
+                <a:spcPts val="0"/>
+              </a:spcAft>
+              <a:buClr>
+                <a:srgbClr val="980000"/>
+              </a:buClr>
+              <a:buSzPts val="2400"/>
+            </a:pPr>
+            <a:r>
+              <a:rPr lang="en-GB" sz="2400" b="1" dirty="0">
+                <a:solidFill>
+                  <a:srgbClr val="00B050"/>
+                </a:solidFill>
+              </a:rPr>
+              <a:t>1. Account Login (D) </a:t>
+            </a:r>
+            <a:endParaRPr sz="2400" b="1" dirty="0">
+              <a:solidFill>
+                <a:srgbClr val="00B050"/>
+              </a:solidFill>
+            </a:endParaRPr>
+          </a:p>
+        </p:txBody>
+      </p:sp>
     </p:spTree>
   </p:cSld>
   <p:clrMapOvr>
@@ -10075,63 +11510,6 @@
       </p:grpSpPr>
       <p:sp>
         <p:nvSpPr>
-          <p:cNvPr id="66" name="Google Shape;66;p15"/>
-          <p:cNvSpPr txBox="1">
-            <a:spLocks noGrp="1"/>
-          </p:cNvSpPr>
-          <p:nvPr>
-            <p:ph type="title"/>
-          </p:nvPr>
-        </p:nvSpPr>
-        <p:spPr>
-          <a:xfrm>
-            <a:off x="156125" y="119905"/>
-            <a:ext cx="8520600" cy="572700"/>
-          </a:xfrm>
-          <a:prstGeom prst="rect">
-            <a:avLst/>
-          </a:prstGeom>
-        </p:spPr>
-        <p:txBody>
-          <a:bodyPr spcFirstLastPara="1" wrap="square" lIns="91425" tIns="91425" rIns="91425" bIns="91425" anchor="t" anchorCtr="0">
-            <a:normAutofit fontScale="90000"/>
-          </a:bodyPr>
-          <a:lstStyle/>
-          <a:p>
-            <a:pPr marL="457200" lvl="0" indent="-381000" algn="l" rtl="0">
-              <a:lnSpc>
-                <a:spcPct val="115000"/>
-              </a:lnSpc>
-              <a:spcBef>
-                <a:spcPts val="0"/>
-              </a:spcBef>
-              <a:spcAft>
-                <a:spcPts val="0"/>
-              </a:spcAft>
-              <a:buClr>
-                <a:srgbClr val="980000"/>
-              </a:buClr>
-              <a:buSzPts val="2400"/>
-              <a:buAutoNum type="arabicPeriod"/>
-            </a:pPr>
-            <a:r>
-              <a:rPr lang="en-GB" sz="2400" b="1" dirty="0">
-                <a:solidFill>
-                  <a:srgbClr val="980000"/>
-                </a:solidFill>
-              </a:rPr>
-              <a:t>Account login (E)</a:t>
-            </a:r>
-            <a:endParaRPr lang="en-US" altLang="en-US" sz="2400" b="1" dirty="0">
-              <a:solidFill>
-                <a:srgbClr val="980000"/>
-              </a:solidFill>
-            </a:endParaRPr>
-          </a:p>
-        </p:txBody>
-      </p:sp>
-      <p:sp>
-        <p:nvSpPr>
           <p:cNvPr id="67" name="Google Shape;67;p15"/>
           <p:cNvSpPr txBox="1">
             <a:spLocks noGrp="1"/>
@@ -10142,8 +11520,8 @@
         </p:nvSpPr>
         <p:spPr>
           <a:xfrm>
-            <a:off x="156124" y="555425"/>
-            <a:ext cx="8520600" cy="3278400"/>
+            <a:off x="156124" y="1085221"/>
+            <a:ext cx="8520600" cy="2748603"/>
           </a:xfrm>
           <a:prstGeom prst="rect">
             <a:avLst/>
@@ -10218,7 +11596,7 @@
         </p:nvGrpSpPr>
         <p:grpSpPr>
           <a:xfrm>
-            <a:off x="241299" y="1348277"/>
+            <a:off x="241617" y="1706162"/>
             <a:ext cx="8660766" cy="3437338"/>
             <a:chOff x="241299" y="1348277"/>
             <a:chExt cx="8660766" cy="3437338"/>
@@ -10268,10 +11646,10 @@
             <p:nvPr/>
           </p:nvPicPr>
           <p:blipFill>
-            <a:blip r:embed="rId4">
+            <a:blip>
               <a:extLst>
                 <a:ext uri="{96DAC541-7B7A-43D3-8B79-37D633B846F1}">
-                  <asvg:svgBlip xmlns:asvg="http://schemas.microsoft.com/office/drawing/2016/SVG/main" r:embed="rId5"/>
+                  <asvg:svgBlip xmlns:asvg="http://schemas.microsoft.com/office/drawing/2016/SVG/main" r:embed="rId4"/>
                 </a:ext>
               </a:extLst>
             </a:blip>
@@ -10304,10 +11682,10 @@
             <p:nvPr/>
           </p:nvPicPr>
           <p:blipFill>
-            <a:blip r:embed="rId6">
+            <a:blip>
               <a:extLst>
                 <a:ext uri="{96DAC541-7B7A-43D3-8B79-37D633B846F1}">
-                  <asvg:svgBlip xmlns:asvg="http://schemas.microsoft.com/office/drawing/2016/SVG/main" r:embed="rId7"/>
+                  <asvg:svgBlip xmlns:asvg="http://schemas.microsoft.com/office/drawing/2016/SVG/main" r:embed="rId5"/>
                 </a:ext>
               </a:extLst>
             </a:blip>
@@ -10326,6 +11704,305 @@
           </p:spPr>
         </p:pic>
       </p:grpSp>
+      <p:sp>
+        <p:nvSpPr>
+          <p:cNvPr id="8" name="Google Shape;102;p20">
+            <a:extLst>
+              <a:ext uri="{FF2B5EF4-FFF2-40B4-BE49-F238E27FC236}">
+                <a16:creationId xmlns:a16="http://schemas.microsoft.com/office/drawing/2014/main" id="{067B68FD-C7DD-888B-A5E7-CE37B66290F6}"/>
+              </a:ext>
+            </a:extLst>
+          </p:cNvPr>
+          <p:cNvSpPr txBox="1">
+            <a:spLocks/>
+          </p:cNvSpPr>
+          <p:nvPr/>
+        </p:nvSpPr>
+        <p:spPr>
+          <a:xfrm>
+            <a:off x="497850" y="445025"/>
+            <a:ext cx="3331500" cy="572700"/>
+          </a:xfrm>
+          <a:prstGeom prst="rect">
+            <a:avLst/>
+          </a:prstGeom>
+          <a:noFill/>
+          <a:ln>
+            <a:noFill/>
+          </a:ln>
+        </p:spPr>
+        <p:txBody>
+          <a:bodyPr spcFirstLastPara="1" wrap="square" lIns="91425" tIns="91425" rIns="91425" bIns="91425" anchor="t" anchorCtr="0">
+            <a:normAutofit fontScale="97500" lnSpcReduction="10000"/>
+          </a:bodyPr>
+          <a:lstStyle>
+            <a:defPPr marR="0" lvl="0" algn="l" rtl="0">
+              <a:lnSpc>
+                <a:spcPct val="100000"/>
+              </a:lnSpc>
+              <a:spcBef>
+                <a:spcPts val="0"/>
+              </a:spcBef>
+              <a:spcAft>
+                <a:spcPts val="0"/>
+              </a:spcAft>
+            </a:defPPr>
+            <a:lvl1pPr marR="0" lvl="0" algn="l" rtl="0">
+              <a:lnSpc>
+                <a:spcPct val="100000"/>
+              </a:lnSpc>
+              <a:spcBef>
+                <a:spcPts val="0"/>
+              </a:spcBef>
+              <a:spcAft>
+                <a:spcPts val="0"/>
+              </a:spcAft>
+              <a:buClr>
+                <a:schemeClr val="dk1"/>
+              </a:buClr>
+              <a:buSzPts val="2800"/>
+              <a:buFont typeface="Arial" panose="020B0604020202020204"/>
+              <a:buNone/>
+              <a:defRPr sz="2800" b="0" i="0" u="none" strike="noStrike" cap="none">
+                <a:solidFill>
+                  <a:schemeClr val="dk1"/>
+                </a:solidFill>
+                <a:latin typeface="Arial" panose="020B0604020202020204"/>
+                <a:ea typeface="Arial" panose="020B0604020202020204"/>
+                <a:cs typeface="Arial" panose="020B0604020202020204"/>
+                <a:sym typeface="Arial" panose="020B0604020202020204"/>
+              </a:defRPr>
+            </a:lvl1pPr>
+            <a:lvl2pPr marR="0" lvl="1" algn="l" rtl="0">
+              <a:lnSpc>
+                <a:spcPct val="100000"/>
+              </a:lnSpc>
+              <a:spcBef>
+                <a:spcPts val="0"/>
+              </a:spcBef>
+              <a:spcAft>
+                <a:spcPts val="0"/>
+              </a:spcAft>
+              <a:buClr>
+                <a:schemeClr val="dk1"/>
+              </a:buClr>
+              <a:buSzPts val="2800"/>
+              <a:buFont typeface="Arial" panose="020B0604020202020204"/>
+              <a:buNone/>
+              <a:defRPr sz="2800" b="0" i="0" u="none" strike="noStrike" cap="none">
+                <a:solidFill>
+                  <a:schemeClr val="dk1"/>
+                </a:solidFill>
+                <a:latin typeface="Arial" panose="020B0604020202020204"/>
+                <a:ea typeface="Arial" panose="020B0604020202020204"/>
+                <a:cs typeface="Arial" panose="020B0604020202020204"/>
+                <a:sym typeface="Arial" panose="020B0604020202020204"/>
+              </a:defRPr>
+            </a:lvl2pPr>
+            <a:lvl3pPr marR="0" lvl="2" algn="l" rtl="0">
+              <a:lnSpc>
+                <a:spcPct val="100000"/>
+              </a:lnSpc>
+              <a:spcBef>
+                <a:spcPts val="0"/>
+              </a:spcBef>
+              <a:spcAft>
+                <a:spcPts val="0"/>
+              </a:spcAft>
+              <a:buClr>
+                <a:schemeClr val="dk1"/>
+              </a:buClr>
+              <a:buSzPts val="2800"/>
+              <a:buFont typeface="Arial" panose="020B0604020202020204"/>
+              <a:buNone/>
+              <a:defRPr sz="2800" b="0" i="0" u="none" strike="noStrike" cap="none">
+                <a:solidFill>
+                  <a:schemeClr val="dk1"/>
+                </a:solidFill>
+                <a:latin typeface="Arial" panose="020B0604020202020204"/>
+                <a:ea typeface="Arial" panose="020B0604020202020204"/>
+                <a:cs typeface="Arial" panose="020B0604020202020204"/>
+                <a:sym typeface="Arial" panose="020B0604020202020204"/>
+              </a:defRPr>
+            </a:lvl3pPr>
+            <a:lvl4pPr marR="0" lvl="3" algn="l" rtl="0">
+              <a:lnSpc>
+                <a:spcPct val="100000"/>
+              </a:lnSpc>
+              <a:spcBef>
+                <a:spcPts val="0"/>
+              </a:spcBef>
+              <a:spcAft>
+                <a:spcPts val="0"/>
+              </a:spcAft>
+              <a:buClr>
+                <a:schemeClr val="dk1"/>
+              </a:buClr>
+              <a:buSzPts val="2800"/>
+              <a:buFont typeface="Arial" panose="020B0604020202020204"/>
+              <a:buNone/>
+              <a:defRPr sz="2800" b="0" i="0" u="none" strike="noStrike" cap="none">
+                <a:solidFill>
+                  <a:schemeClr val="dk1"/>
+                </a:solidFill>
+                <a:latin typeface="Arial" panose="020B0604020202020204"/>
+                <a:ea typeface="Arial" panose="020B0604020202020204"/>
+                <a:cs typeface="Arial" panose="020B0604020202020204"/>
+                <a:sym typeface="Arial" panose="020B0604020202020204"/>
+              </a:defRPr>
+            </a:lvl4pPr>
+            <a:lvl5pPr marR="0" lvl="4" algn="l" rtl="0">
+              <a:lnSpc>
+                <a:spcPct val="100000"/>
+              </a:lnSpc>
+              <a:spcBef>
+                <a:spcPts val="0"/>
+              </a:spcBef>
+              <a:spcAft>
+                <a:spcPts val="0"/>
+              </a:spcAft>
+              <a:buClr>
+                <a:schemeClr val="dk1"/>
+              </a:buClr>
+              <a:buSzPts val="2800"/>
+              <a:buFont typeface="Arial" panose="020B0604020202020204"/>
+              <a:buNone/>
+              <a:defRPr sz="2800" b="0" i="0" u="none" strike="noStrike" cap="none">
+                <a:solidFill>
+                  <a:schemeClr val="dk1"/>
+                </a:solidFill>
+                <a:latin typeface="Arial" panose="020B0604020202020204"/>
+                <a:ea typeface="Arial" panose="020B0604020202020204"/>
+                <a:cs typeface="Arial" panose="020B0604020202020204"/>
+                <a:sym typeface="Arial" panose="020B0604020202020204"/>
+              </a:defRPr>
+            </a:lvl5pPr>
+            <a:lvl6pPr marR="0" lvl="5" algn="l" rtl="0">
+              <a:lnSpc>
+                <a:spcPct val="100000"/>
+              </a:lnSpc>
+              <a:spcBef>
+                <a:spcPts val="0"/>
+              </a:spcBef>
+              <a:spcAft>
+                <a:spcPts val="0"/>
+              </a:spcAft>
+              <a:buClr>
+                <a:schemeClr val="dk1"/>
+              </a:buClr>
+              <a:buSzPts val="2800"/>
+              <a:buFont typeface="Arial" panose="020B0604020202020204"/>
+              <a:buNone/>
+              <a:defRPr sz="2800" b="0" i="0" u="none" strike="noStrike" cap="none">
+                <a:solidFill>
+                  <a:schemeClr val="dk1"/>
+                </a:solidFill>
+                <a:latin typeface="Arial" panose="020B0604020202020204"/>
+                <a:ea typeface="Arial" panose="020B0604020202020204"/>
+                <a:cs typeface="Arial" panose="020B0604020202020204"/>
+                <a:sym typeface="Arial" panose="020B0604020202020204"/>
+              </a:defRPr>
+            </a:lvl6pPr>
+            <a:lvl7pPr marR="0" lvl="6" algn="l" rtl="0">
+              <a:lnSpc>
+                <a:spcPct val="100000"/>
+              </a:lnSpc>
+              <a:spcBef>
+                <a:spcPts val="0"/>
+              </a:spcBef>
+              <a:spcAft>
+                <a:spcPts val="0"/>
+              </a:spcAft>
+              <a:buClr>
+                <a:schemeClr val="dk1"/>
+              </a:buClr>
+              <a:buSzPts val="2800"/>
+              <a:buFont typeface="Arial" panose="020B0604020202020204"/>
+              <a:buNone/>
+              <a:defRPr sz="2800" b="0" i="0" u="none" strike="noStrike" cap="none">
+                <a:solidFill>
+                  <a:schemeClr val="dk1"/>
+                </a:solidFill>
+                <a:latin typeface="Arial" panose="020B0604020202020204"/>
+                <a:ea typeface="Arial" panose="020B0604020202020204"/>
+                <a:cs typeface="Arial" panose="020B0604020202020204"/>
+                <a:sym typeface="Arial" panose="020B0604020202020204"/>
+              </a:defRPr>
+            </a:lvl7pPr>
+            <a:lvl8pPr marR="0" lvl="7" algn="l" rtl="0">
+              <a:lnSpc>
+                <a:spcPct val="100000"/>
+              </a:lnSpc>
+              <a:spcBef>
+                <a:spcPts val="0"/>
+              </a:spcBef>
+              <a:spcAft>
+                <a:spcPts val="0"/>
+              </a:spcAft>
+              <a:buClr>
+                <a:schemeClr val="dk1"/>
+              </a:buClr>
+              <a:buSzPts val="2800"/>
+              <a:buFont typeface="Arial" panose="020B0604020202020204"/>
+              <a:buNone/>
+              <a:defRPr sz="2800" b="0" i="0" u="none" strike="noStrike" cap="none">
+                <a:solidFill>
+                  <a:schemeClr val="dk1"/>
+                </a:solidFill>
+                <a:latin typeface="Arial" panose="020B0604020202020204"/>
+                <a:ea typeface="Arial" panose="020B0604020202020204"/>
+                <a:cs typeface="Arial" panose="020B0604020202020204"/>
+                <a:sym typeface="Arial" panose="020B0604020202020204"/>
+              </a:defRPr>
+            </a:lvl8pPr>
+            <a:lvl9pPr marR="0" lvl="8" algn="l" rtl="0">
+              <a:lnSpc>
+                <a:spcPct val="100000"/>
+              </a:lnSpc>
+              <a:spcBef>
+                <a:spcPts val="0"/>
+              </a:spcBef>
+              <a:spcAft>
+                <a:spcPts val="0"/>
+              </a:spcAft>
+              <a:buClr>
+                <a:schemeClr val="dk1"/>
+              </a:buClr>
+              <a:buSzPts val="2800"/>
+              <a:buFont typeface="Arial" panose="020B0604020202020204"/>
+              <a:buNone/>
+              <a:defRPr sz="2800" b="0" i="0" u="none" strike="noStrike" cap="none">
+                <a:solidFill>
+                  <a:schemeClr val="dk1"/>
+                </a:solidFill>
+                <a:latin typeface="Arial" panose="020B0604020202020204"/>
+                <a:ea typeface="Arial" panose="020B0604020202020204"/>
+                <a:cs typeface="Arial" panose="020B0604020202020204"/>
+                <a:sym typeface="Arial" panose="020B0604020202020204"/>
+              </a:defRPr>
+            </a:lvl9pPr>
+          </a:lstStyle>
+          <a:p>
+            <a:pPr marL="76200">
+              <a:lnSpc>
+                <a:spcPct val="115000"/>
+              </a:lnSpc>
+              <a:buClr>
+                <a:srgbClr val="980000"/>
+              </a:buClr>
+              <a:buSzPts val="2400"/>
+            </a:pPr>
+            <a:r>
+              <a:rPr lang="en-GB" sz="2400" b="1" dirty="0">
+                <a:solidFill>
+                  <a:srgbClr val="00B050"/>
+                </a:solidFill>
+              </a:rPr>
+              <a:t>1. Account Login (E) </a:t>
+            </a:r>
+          </a:p>
+        </p:txBody>
+      </p:sp>
     </p:spTree>
   </p:cSld>
   <p:clrMapOvr>
@@ -10363,7 +12040,7 @@
         </p:nvSpPr>
         <p:spPr>
           <a:xfrm>
-            <a:off x="132208" y="232157"/>
+            <a:off x="217619" y="1132418"/>
             <a:ext cx="8879583" cy="572700"/>
           </a:xfrm>
           <a:prstGeom prst="rect">
@@ -10409,7 +12086,7 @@
         </p:nvGrpSpPr>
         <p:grpSpPr>
           <a:xfrm>
-            <a:off x="649586" y="1312901"/>
+            <a:off x="781795" y="1760053"/>
             <a:ext cx="8362205" cy="3192191"/>
             <a:chOff x="649586" y="1312901"/>
             <a:chExt cx="8362205" cy="3192191"/>
@@ -10514,10 +12191,10 @@
             <p:nvPr/>
           </p:nvPicPr>
           <p:blipFill>
-            <a:blip r:embed="rId4">
+            <a:blip>
               <a:extLst>
                 <a:ext uri="{96DAC541-7B7A-43D3-8B79-37D633B846F1}">
-                  <asvg:svgBlip xmlns:asvg="http://schemas.microsoft.com/office/drawing/2016/SVG/main" r:embed="rId5"/>
+                  <asvg:svgBlip xmlns:asvg="http://schemas.microsoft.com/office/drawing/2016/SVG/main" r:embed="rId4"/>
                 </a:ext>
               </a:extLst>
             </a:blip>
@@ -10573,7 +12250,7 @@
         </p:nvSpPr>
         <p:spPr>
           <a:xfrm>
-            <a:off x="311699" y="177740"/>
+            <a:off x="512666" y="519585"/>
             <a:ext cx="4102256" cy="572700"/>
           </a:xfrm>
           <a:prstGeom prst="rect">
@@ -10598,14 +12275,14 @@
             <a:r>
               <a:rPr lang="en-US" sz="2800" b="1" dirty="0">
                 <a:solidFill>
-                  <a:srgbClr val="980000"/>
+                  <a:srgbClr val="00B050"/>
                 </a:solidFill>
               </a:rPr>
               <a:t>2. Paper Assignment (A)</a:t>
             </a:r>
             <a:endParaRPr dirty="0">
               <a:solidFill>
-                <a:srgbClr val="FF0000"/>
+                <a:srgbClr val="00B050"/>
               </a:solidFill>
             </a:endParaRPr>
           </a:p>
@@ -10623,8 +12300,8 @@
         </p:nvSpPr>
         <p:spPr>
           <a:xfrm>
-            <a:off x="311700" y="750625"/>
-            <a:ext cx="4102255" cy="1545569"/>
+            <a:off x="311700" y="1115600"/>
+            <a:ext cx="4375856" cy="1180594"/>
           </a:xfrm>
           <a:prstGeom prst="rect">
             <a:avLst/>
@@ -10632,7 +12309,7 @@
         </p:spPr>
         <p:txBody>
           <a:bodyPr spcFirstLastPara="1" wrap="square" lIns="91425" tIns="91425" rIns="91425" bIns="91425" anchor="t" anchorCtr="0">
-            <a:normAutofit/>
+            <a:normAutofit fontScale="92500" lnSpcReduction="10000"/>
           </a:bodyPr>
           <a:lstStyle/>
           <a:p>
@@ -10643,10 +12320,18 @@
               <a:buNone/>
             </a:pPr>
             <a:r>
-              <a:rPr lang="en-US" dirty="0"/>
+              <a:rPr lang="en-US" dirty="0">
+                <a:solidFill>
+                  <a:schemeClr val="tx1"/>
+                </a:solidFill>
+              </a:rPr>
               <a:t>After clicking “Assignment” and then “by PC Member”, you will be able to review current assignment of papers.</a:t>
             </a:r>
-            <a:endParaRPr dirty="0"/>
+            <a:endParaRPr dirty="0">
+              <a:solidFill>
+                <a:schemeClr val="tx1"/>
+              </a:solidFill>
+            </a:endParaRPr>
           </a:p>
         </p:txBody>
       </p:sp>
@@ -10777,10 +12462,10 @@
             <p:nvPr/>
           </p:nvPicPr>
           <p:blipFill>
-            <a:blip r:embed="rId5">
+            <a:blip>
               <a:extLst>
                 <a:ext uri="{96DAC541-7B7A-43D3-8B79-37D633B846F1}">
-                  <asvg:svgBlip xmlns:asvg="http://schemas.microsoft.com/office/drawing/2016/SVG/main" r:embed="rId6"/>
+                  <asvg:svgBlip xmlns:asvg="http://schemas.microsoft.com/office/drawing/2016/SVG/main" r:embed="rId5"/>
                 </a:ext>
               </a:extLst>
             </a:blip>
@@ -10807,10 +12492,10 @@
             <p:nvPr/>
           </p:nvPicPr>
           <p:blipFill>
-            <a:blip r:embed="rId7">
+            <a:blip>
               <a:extLst>
                 <a:ext uri="{96DAC541-7B7A-43D3-8B79-37D633B846F1}">
-                  <asvg:svgBlip xmlns:asvg="http://schemas.microsoft.com/office/drawing/2016/SVG/main" r:embed="rId8"/>
+                  <asvg:svgBlip xmlns:asvg="http://schemas.microsoft.com/office/drawing/2016/SVG/main" r:embed="rId6"/>
                 </a:ext>
               </a:extLst>
             </a:blip>
@@ -10884,10 +12569,10 @@
           <p:nvPr/>
         </p:nvPicPr>
         <p:blipFill>
-          <a:blip r:embed="rId9">
+          <a:blip>
             <a:extLst>
               <a:ext uri="{96DAC541-7B7A-43D3-8B79-37D633B846F1}">
-                <asvg:svgBlip xmlns:asvg="http://schemas.microsoft.com/office/drawing/2016/SVG/main" r:embed="rId10"/>
+                <asvg:svgBlip xmlns:asvg="http://schemas.microsoft.com/office/drawing/2016/SVG/main" r:embed="rId7"/>
               </a:ext>
             </a:extLst>
           </a:blip>
